--- a/Y9_Exploring_Science/9C_Threat_from_disease/9C_L07_In_and_out_surface_area_diffusion_and_osmosis.pptx
+++ b/Y9_Exploring_Science/9C_Threat_from_disease/9C_L07_In_and_out_surface_area_diffusion_and_osmosis.pptx
@@ -1829,7 +1829,7 @@
         <p:spPr>
           <a:xfrm>
             <a:off x="548640" y="3657600"/>
-            <a:ext cx="10515600" cy="914400"/>
+            <a:ext cx="10515600" cy="1097280"/>
           </a:xfrm>
           <a:prstGeom prst="rect">
             <a:avLst/>
@@ -1842,7 +1842,7 @@
           <a:lstStyle>
             <a:lvl1pPr indent="0" marL="0">
               <a:buNone/>
-              <a:defRPr lang="en-US" sz="2000" dirty="0">
+              <a:defRPr lang="en-US" sz="2400" dirty="0">
                 <a:solidFill>
                   <a:srgbClr val="FFFFFF"/>
                 </a:solidFill>
@@ -1853,7 +1853,7 @@
             <a:pPr indent="0" marL="0">
               <a:buNone/>
             </a:pPr>
-            <a:endParaRPr lang="en-US" sz="2000" dirty="0"/>
+            <a:endParaRPr lang="en-US" sz="2400" dirty="0"/>
           </a:p>
         </p:txBody>
       </p:sp>
@@ -1953,14 +1953,14 @@
               <a:buNone/>
             </a:pPr>
             <a:r>
-              <a:rPr lang="en-US" sz="900" dirty="0">
+              <a:rPr lang="en-US" sz="1000" dirty="0">
                 <a:solidFill>
                   <a:srgbClr val="5B6574"/>
                 </a:solidFill>
               </a:rPr>
               <a:t>Year 9 Science  |  9C Threat from disease  |  Lesson 7: In and out: surface area, diffusion and osmosis</a:t>
             </a:r>
-            <a:endParaRPr lang="en-US" sz="900" dirty="0"/>
+            <a:endParaRPr lang="en-US" sz="1000" dirty="0"/>
           </a:p>
         </p:txBody>
       </p:sp>
@@ -2129,14 +2129,14 @@
               <a:buNone/>
             </a:pPr>
             <a:r>
-              <a:rPr lang="en-US" sz="900" dirty="0">
+              <a:rPr lang="en-US" sz="1000" dirty="0">
                 <a:solidFill>
                   <a:srgbClr val="5B6574"/>
                 </a:solidFill>
               </a:rPr>
               <a:t>Year 9 Science  |  9C Threat from disease  |  Lesson 7: In and out: surface area, diffusion and osmosis</a:t>
             </a:r>
-            <a:endParaRPr lang="en-US" sz="900" dirty="0"/>
+            <a:endParaRPr lang="en-US" sz="1000" dirty="0"/>
           </a:p>
         </p:txBody>
       </p:sp>
@@ -2305,14 +2305,14 @@
               <a:buNone/>
             </a:pPr>
             <a:r>
-              <a:rPr lang="en-US" sz="900" dirty="0">
+              <a:rPr lang="en-US" sz="1000" dirty="0">
                 <a:solidFill>
                   <a:srgbClr val="5B6574"/>
                 </a:solidFill>
               </a:rPr>
               <a:t>Year 9 Science  |  9C Threat from disease  |  Lesson 7: In and out: surface area, diffusion and osmosis</a:t>
             </a:r>
-            <a:endParaRPr lang="en-US" sz="900" dirty="0"/>
+            <a:endParaRPr lang="en-US" sz="1000" dirty="0"/>
           </a:p>
         </p:txBody>
       </p:sp>
@@ -2441,7 +2441,7 @@
           <a:lstStyle>
             <a:lvl1pPr indent="0" marL="0">
               <a:buNone/>
-              <a:defRPr lang="en-US" sz="3000" b="1" dirty="0">
+              <a:defRPr lang="en-US" sz="3400" b="1" dirty="0">
                 <a:solidFill>
                   <a:srgbClr val="3A2E00"/>
                 </a:solidFill>
@@ -2452,7 +2452,7 @@
             <a:pPr indent="0" marL="0">
               <a:buNone/>
             </a:pPr>
-            <a:endParaRPr lang="en-US" sz="3000" dirty="0"/>
+            <a:endParaRPr lang="en-US" sz="3400" dirty="0"/>
           </a:p>
         </p:txBody>
       </p:sp>
@@ -2869,14 +2869,14 @@
               <a:buNone/>
             </a:pPr>
             <a:r>
-              <a:rPr lang="en-US" sz="1300" b="1" spc="200" kern="0" dirty="0">
+              <a:rPr lang="en-US" sz="1400" b="1" spc="200" kern="0" dirty="0">
                 <a:solidFill>
                   <a:srgbClr val="F2CE3E"/>
                 </a:solidFill>
               </a:rPr>
               <a:t>YEAR 9 SCIENCE  ·  9C THREAT FROM DISEASE  ·  LESSON 7 OF 7</a:t>
             </a:r>
-            <a:endParaRPr lang="en-US" sz="1300" dirty="0"/>
+            <a:endParaRPr lang="en-US" sz="1400" dirty="0"/>
           </a:p>
         </p:txBody>
       </p:sp>
@@ -2929,7 +2929,7 @@
         <p:spPr>
           <a:xfrm>
             <a:off x="548640" y="3657600"/>
-            <a:ext cx="10515600" cy="914400"/>
+            <a:ext cx="10515600" cy="1097280"/>
           </a:xfrm>
           <a:prstGeom prst="rect">
             <a:avLst/>
@@ -2945,14 +2945,14 @@
               <a:buNone/>
             </a:pPr>
             <a:r>
-              <a:rPr lang="en-US" sz="2000" dirty="0">
+              <a:rPr lang="en-US" sz="2400" dirty="0">
                 <a:solidFill>
                   <a:srgbClr val="FFFFFF"/>
                 </a:solidFill>
               </a:rPr>
               <a:t>How do substances get into and out of cells, and why does size matter?</a:t>
             </a:r>
-            <a:endParaRPr lang="en-US" sz="2000" dirty="0"/>
+            <a:endParaRPr lang="en-US" sz="2400" dirty="0"/>
           </a:p>
         </p:txBody>
       </p:sp>
@@ -2981,14 +2981,14 @@
               <a:buNone/>
             </a:pPr>
             <a:r>
-              <a:rPr lang="en-US" sz="1200" dirty="0">
+              <a:rPr lang="en-US" sz="1400" dirty="0">
                 <a:solidFill>
                   <a:srgbClr val="C9D3E6"/>
                 </a:solidFill>
               </a:rPr>
               <a:t>Exploring Science International 9  ·  Student Book pages 50 to 52  ·  Workbook pages 36 to 38</a:t>
             </a:r>
-            <a:endParaRPr lang="en-US" sz="1200" dirty="0"/>
+            <a:endParaRPr lang="en-US" sz="1400" dirty="0"/>
           </a:p>
         </p:txBody>
       </p:sp>
@@ -3167,7 +3167,7 @@
               <a:buNone/>
             </a:pPr>
             <a:r>
-              <a:rPr lang="en-US" sz="1500" b="1" dirty="0">
+              <a:rPr lang="en-US" sz="1800" b="1" dirty="0">
                 <a:solidFill>
                   <a:srgbClr val="7B3A8E"/>
                 </a:solidFill>
@@ -3178,14 +3178,14 @@
               <a:buNone/>
             </a:pPr>
             <a:r>
-              <a:rPr lang="en-US" sz="1500" dirty="0">
+              <a:rPr lang="en-US" sz="1800" dirty="0">
                 <a:solidFill>
                   <a:srgbClr val="141B26"/>
                 </a:solidFill>
               </a:rPr>
               <a:t>Find out what happens to potato tissue in pure water and in strong salt solution.</a:t>
             </a:r>
-            <a:endParaRPr lang="en-US" sz="1500" dirty="0"/>
+            <a:endParaRPr lang="en-US" sz="1800" dirty="0"/>
           </a:p>
         </p:txBody>
       </p:sp>
@@ -3214,14 +3214,14 @@
               <a:buNone/>
             </a:pPr>
             <a:r>
-              <a:rPr lang="en-US" sz="1600" b="1" dirty="0">
+              <a:rPr lang="en-US" sz="1800" b="1" dirty="0">
                 <a:solidFill>
                   <a:srgbClr val="0F2A5F"/>
                 </a:solidFill>
               </a:rPr>
               <a:t>Equipment</a:t>
             </a:r>
-            <a:endParaRPr lang="en-US" sz="1600" dirty="0"/>
+            <a:endParaRPr lang="en-US" sz="1800" dirty="0"/>
           </a:p>
         </p:txBody>
       </p:sp>
@@ -3243,255 +3243,251 @@
           <a:ln/>
         </p:spPr>
         <p:txBody>
-          <a:bodyPr wrap="square" lIns="0" tIns="0" rIns="0" bIns="0" rtlCol="0" anchor="t">
-            <a:normAutofit/>
-          </a:bodyPr>
-          <a:lstStyle/>
-          <a:p>
-            <a:pPr marL="228600" indent="-228600">
+          <a:bodyPr wrap="square" lIns="0" tIns="0" rIns="0" bIns="0" rtlCol="0" anchor="t"/>
+          <a:lstStyle/>
+          <a:p>
+            <a:pPr marL="304800" indent="-304800">
+              <a:spcAft>
+                <a:spcPts val="800"/>
+              </a:spcAft>
+              <a:buSzPct val="100000"/>
+              <a:buChar char="•"/>
+            </a:pPr>
+            <a:r>
+              <a:rPr lang="en-US" sz="1600" dirty="0">
+                <a:solidFill>
+                  <a:srgbClr val="141B26"/>
+                </a:solidFill>
+              </a:rPr>
+              <a:t>two potato strips of equal size</a:t>
+            </a:r>
+            <a:endParaRPr lang="en-US" sz="1600" dirty="0"/>
+          </a:p>
+          <a:p>
+            <a:pPr marL="304800" indent="-304800">
+              <a:spcAft>
+                <a:spcPts val="800"/>
+              </a:spcAft>
+              <a:buSzPct val="100000"/>
+              <a:buChar char="•"/>
+            </a:pPr>
+            <a:r>
+              <a:rPr lang="en-US" sz="1600" dirty="0">
+                <a:solidFill>
+                  <a:srgbClr val="141B26"/>
+                </a:solidFill>
+              </a:rPr>
+              <a:t>two tubes or beakers, labelled W and S</a:t>
+            </a:r>
+            <a:endParaRPr lang="en-US" sz="1600" dirty="0"/>
+          </a:p>
+          <a:p>
+            <a:pPr marL="304800" indent="-304800">
+              <a:spcAft>
+                <a:spcPts val="800"/>
+              </a:spcAft>
+              <a:buSzPct val="100000"/>
+              <a:buChar char="•"/>
+            </a:pPr>
+            <a:r>
+              <a:rPr lang="en-US" sz="1600" dirty="0">
+                <a:solidFill>
+                  <a:srgbClr val="141B26"/>
+                </a:solidFill>
+              </a:rPr>
+              <a:t>pure water and strong salt solution</a:t>
+            </a:r>
+            <a:endParaRPr lang="en-US" sz="1600" dirty="0"/>
+          </a:p>
+          <a:p>
+            <a:pPr marL="304800" indent="-304800">
+              <a:spcAft>
+                <a:spcPts val="800"/>
+              </a:spcAft>
+              <a:buSzPct val="100000"/>
+              <a:buChar char="•"/>
+            </a:pPr>
+            <a:r>
+              <a:rPr lang="en-US" sz="1600" dirty="0">
+                <a:solidFill>
+                  <a:srgbClr val="141B26"/>
+                </a:solidFill>
+              </a:rPr>
+              <a:t>ruler (mm), paper towel, optional balance</a:t>
+            </a:r>
+            <a:endParaRPr lang="en-US" sz="1600" dirty="0"/>
+          </a:p>
+        </p:txBody>
+      </p:sp>
+      <p:sp>
+        <p:nvSpPr>
+          <p:cNvPr id="8" name="Text 6"/>
+          <p:cNvSpPr txBox="1"/>
+          <p:nvPr/>
+        </p:nvSpPr>
+        <p:spPr>
+          <a:xfrm>
+            <a:off x="4937760" y="1828800"/>
+            <a:ext cx="6675120" cy="365760"/>
+          </a:xfrm>
+          <a:prstGeom prst="rect">
+            <a:avLst/>
+          </a:prstGeom>
+          <a:noFill/>
+          <a:ln/>
+        </p:spPr>
+        <p:txBody>
+          <a:bodyPr wrap="square" lIns="0" tIns="0" rIns="0" bIns="0" rtlCol="0" anchor="ctr"/>
+          <a:lstStyle/>
+          <a:p>
+            <a:pPr indent="0" marL="0">
+              <a:buNone/>
+            </a:pPr>
+            <a:r>
+              <a:rPr lang="en-US" sz="1800" b="1" dirty="0">
+                <a:solidFill>
+                  <a:srgbClr val="0F2A5F"/>
+                </a:solidFill>
+              </a:rPr>
+              <a:t>Method</a:t>
+            </a:r>
+            <a:endParaRPr lang="en-US" sz="1800" dirty="0"/>
+          </a:p>
+        </p:txBody>
+      </p:sp>
+      <p:sp>
+        <p:nvSpPr>
+          <p:cNvPr id="9" name="Text 7"/>
+          <p:cNvSpPr txBox="1"/>
+          <p:nvPr/>
+        </p:nvSpPr>
+        <p:spPr>
+          <a:xfrm>
+            <a:off x="4937760" y="2240280"/>
+            <a:ext cx="6675120" cy="3200400"/>
+          </a:xfrm>
+          <a:prstGeom prst="rect">
+            <a:avLst/>
+          </a:prstGeom>
+          <a:noFill/>
+          <a:ln/>
+        </p:spPr>
+        <p:txBody>
+          <a:bodyPr wrap="square" lIns="0" tIns="0" rIns="0" bIns="0" rtlCol="0" anchor="t"/>
+          <a:lstStyle/>
+          <a:p>
+            <a:pPr marL="342900" indent="-342900">
               <a:spcAft>
                 <a:spcPts val="600"/>
               </a:spcAft>
               <a:buSzPct val="100000"/>
-              <a:buChar char="•"/>
-            </a:pPr>
-            <a:r>
-              <a:rPr lang="en-US" sz="1300" dirty="0">
+              <a:buFont typeface="+mj-lt"/>
+              <a:buAutoNum type="arabicPeriod" startAt="1"/>
+            </a:pPr>
+            <a:r>
+              <a:rPr lang="en-US" sz="1600" dirty="0">
                 <a:solidFill>
                   <a:srgbClr val="141B26"/>
                 </a:solidFill>
               </a:rPr>
-              <a:t>two potato strips of equal size</a:t>
-            </a:r>
-            <a:endParaRPr lang="en-US" sz="1300" dirty="0"/>
-          </a:p>
-          <a:p>
-            <a:pPr marL="228600" indent="-228600">
+              <a:t>Measure the length of each strip to the nearest mm (and the mass, if you have a balance). Record in Core 3.</a:t>
+            </a:r>
+            <a:endParaRPr lang="en-US" sz="1600" dirty="0"/>
+          </a:p>
+          <a:p>
+            <a:pPr marL="342900" indent="-342900">
               <a:spcAft>
                 <a:spcPts val="600"/>
               </a:spcAft>
               <a:buSzPct val="100000"/>
-              <a:buChar char="•"/>
-            </a:pPr>
-            <a:r>
-              <a:rPr lang="en-US" sz="1300" dirty="0">
+              <a:buFont typeface="+mj-lt"/>
+              <a:buAutoNum type="arabicPeriod" startAt="1"/>
+            </a:pPr>
+            <a:r>
+              <a:rPr lang="en-US" sz="1600" dirty="0">
                 <a:solidFill>
                   <a:srgbClr val="141B26"/>
                 </a:solidFill>
               </a:rPr>
-              <a:t>two tubes or beakers, labelled W and S</a:t>
-            </a:r>
-            <a:endParaRPr lang="en-US" sz="1300" dirty="0"/>
-          </a:p>
-          <a:p>
-            <a:pPr marL="228600" indent="-228600">
+              <a:t>Put strip A into water (W) and strip B into salt solution (S). Note the time.</a:t>
+            </a:r>
+            <a:endParaRPr lang="en-US" sz="1600" dirty="0"/>
+          </a:p>
+          <a:p>
+            <a:pPr marL="342900" indent="-342900">
               <a:spcAft>
                 <a:spcPts val="600"/>
               </a:spcAft>
               <a:buSzPct val="100000"/>
-              <a:buChar char="•"/>
-            </a:pPr>
-            <a:r>
-              <a:rPr lang="en-US" sz="1300" dirty="0">
+              <a:buFont typeface="+mj-lt"/>
+              <a:buAutoNum type="arabicPeriod" startAt="1"/>
+            </a:pPr>
+            <a:r>
+              <a:rPr lang="en-US" sz="1600" dirty="0">
                 <a:solidFill>
                   <a:srgbClr val="141B26"/>
                 </a:solidFill>
               </a:rPr>
-              <a:t>pure water and strong salt solution</a:t>
-            </a:r>
-            <a:endParaRPr lang="en-US" sz="1300" dirty="0"/>
-          </a:p>
-          <a:p>
-            <a:pPr marL="228600" indent="-228600">
+              <a:t>Work on the worksheet while you wait (at least 15 minutes).</a:t>
+            </a:r>
+            <a:endParaRPr lang="en-US" sz="1600" dirty="0"/>
+          </a:p>
+          <a:p>
+            <a:pPr marL="342900" indent="-342900">
               <a:spcAft>
                 <a:spcPts val="600"/>
               </a:spcAft>
               <a:buSzPct val="100000"/>
-              <a:buChar char="•"/>
-            </a:pPr>
-            <a:r>
-              <a:rPr lang="en-US" sz="1300" dirty="0">
+              <a:buFont typeface="+mj-lt"/>
+              <a:buAutoNum type="arabicPeriod" startAt="1"/>
+            </a:pPr>
+            <a:r>
+              <a:rPr lang="en-US" sz="1600" dirty="0">
                 <a:solidFill>
                   <a:srgbClr val="141B26"/>
                 </a:solidFill>
               </a:rPr>
-              <a:t>ruler (mm), paper towel, optional balance</a:t>
-            </a:r>
-            <a:endParaRPr lang="en-US" sz="1300" dirty="0"/>
-          </a:p>
-        </p:txBody>
-      </p:sp>
-      <p:sp>
-        <p:nvSpPr>
-          <p:cNvPr id="8" name="Text 6"/>
-          <p:cNvSpPr txBox="1"/>
-          <p:nvPr/>
-        </p:nvSpPr>
-        <p:spPr>
-          <a:xfrm>
-            <a:off x="4937760" y="1828800"/>
-            <a:ext cx="6675120" cy="365760"/>
-          </a:xfrm>
-          <a:prstGeom prst="rect">
-            <a:avLst/>
-          </a:prstGeom>
-          <a:noFill/>
-          <a:ln/>
-        </p:spPr>
-        <p:txBody>
-          <a:bodyPr wrap="square" lIns="0" tIns="0" rIns="0" bIns="0" rtlCol="0" anchor="ctr"/>
-          <a:lstStyle/>
-          <a:p>
-            <a:pPr indent="0" marL="0">
-              <a:buNone/>
-            </a:pPr>
-            <a:r>
-              <a:rPr lang="en-US" sz="1600" b="1" dirty="0">
-                <a:solidFill>
-                  <a:srgbClr val="0F2A5F"/>
-                </a:solidFill>
-              </a:rPr>
-              <a:t>Method</a:t>
+              <a:t>Take the strips out, blot them gently and measure again.</a:t>
             </a:r>
             <a:endParaRPr lang="en-US" sz="1600" dirty="0"/>
           </a:p>
-        </p:txBody>
-      </p:sp>
-      <p:sp>
-        <p:nvSpPr>
-          <p:cNvPr id="9" name="Text 7"/>
-          <p:cNvSpPr txBox="1"/>
-          <p:nvPr/>
-        </p:nvSpPr>
-        <p:spPr>
-          <a:xfrm>
-            <a:off x="4937760" y="2240280"/>
-            <a:ext cx="6675120" cy="3200400"/>
-          </a:xfrm>
-          <a:prstGeom prst="rect">
-            <a:avLst/>
-          </a:prstGeom>
-          <a:noFill/>
-          <a:ln/>
-        </p:spPr>
-        <p:txBody>
-          <a:bodyPr wrap="square" lIns="0" tIns="0" rIns="0" bIns="0" rtlCol="0" anchor="t">
-            <a:normAutofit/>
-          </a:bodyPr>
-          <a:lstStyle/>
           <a:p>
             <a:pPr marL="342900" indent="-342900">
               <a:spcAft>
-                <a:spcPts val="500"/>
+                <a:spcPts val="600"/>
               </a:spcAft>
               <a:buSzPct val="100000"/>
               <a:buFont typeface="+mj-lt"/>
               <a:buAutoNum type="arabicPeriod" startAt="1"/>
             </a:pPr>
             <a:r>
-              <a:rPr lang="en-US" sz="1300" dirty="0">
+              <a:rPr lang="en-US" sz="1600" dirty="0">
                 <a:solidFill>
                   <a:srgbClr val="141B26"/>
                 </a:solidFill>
               </a:rPr>
-              <a:t>Measure the length of each strip to the nearest mm (and the mass, if you have a balance). Record in Core 3.</a:t>
-            </a:r>
-            <a:endParaRPr lang="en-US" sz="1300" dirty="0"/>
+              <a:t>Calculate the change in length (and mass). Feel each strip: firm or floppy?</a:t>
+            </a:r>
+            <a:endParaRPr lang="en-US" sz="1600" dirty="0"/>
           </a:p>
           <a:p>
             <a:pPr marL="342900" indent="-342900">
               <a:spcAft>
-                <a:spcPts val="500"/>
+                <a:spcPts val="600"/>
               </a:spcAft>
               <a:buSzPct val="100000"/>
               <a:buFont typeface="+mj-lt"/>
               <a:buAutoNum type="arabicPeriod" startAt="1"/>
             </a:pPr>
             <a:r>
-              <a:rPr lang="en-US" sz="1300" dirty="0">
+              <a:rPr lang="en-US" sz="1600" dirty="0">
                 <a:solidFill>
                   <a:srgbClr val="141B26"/>
                 </a:solidFill>
               </a:rPr>
-              <a:t>Put strip A into water (W) and strip B into salt solution (S). Note the time.</a:t>
-            </a:r>
-            <a:endParaRPr lang="en-US" sz="1300" dirty="0"/>
-          </a:p>
-          <a:p>
-            <a:pPr marL="342900" indent="-342900">
-              <a:spcAft>
-                <a:spcPts val="500"/>
-              </a:spcAft>
-              <a:buSzPct val="100000"/>
-              <a:buFont typeface="+mj-lt"/>
-              <a:buAutoNum type="arabicPeriod" startAt="1"/>
-            </a:pPr>
-            <a:r>
-              <a:rPr lang="en-US" sz="1300" dirty="0">
-                <a:solidFill>
-                  <a:srgbClr val="141B26"/>
-                </a:solidFill>
-              </a:rPr>
-              <a:t>Work on the worksheet while you wait (at least 15 minutes).</a:t>
-            </a:r>
-            <a:endParaRPr lang="en-US" sz="1300" dirty="0"/>
-          </a:p>
-          <a:p>
-            <a:pPr marL="342900" indent="-342900">
-              <a:spcAft>
-                <a:spcPts val="500"/>
-              </a:spcAft>
-              <a:buSzPct val="100000"/>
-              <a:buFont typeface="+mj-lt"/>
-              <a:buAutoNum type="arabicPeriod" startAt="1"/>
-            </a:pPr>
-            <a:r>
-              <a:rPr lang="en-US" sz="1300" dirty="0">
-                <a:solidFill>
-                  <a:srgbClr val="141B26"/>
-                </a:solidFill>
-              </a:rPr>
-              <a:t>Take the strips out, blot them gently and measure again.</a:t>
-            </a:r>
-            <a:endParaRPr lang="en-US" sz="1300" dirty="0"/>
-          </a:p>
-          <a:p>
-            <a:pPr marL="342900" indent="-342900">
-              <a:spcAft>
-                <a:spcPts val="500"/>
-              </a:spcAft>
-              <a:buSzPct val="100000"/>
-              <a:buFont typeface="+mj-lt"/>
-              <a:buAutoNum type="arabicPeriod" startAt="1"/>
-            </a:pPr>
-            <a:r>
-              <a:rPr lang="en-US" sz="1300" dirty="0">
-                <a:solidFill>
-                  <a:srgbClr val="141B26"/>
-                </a:solidFill>
-              </a:rPr>
-              <a:t>Calculate the change in length (and mass). Feel each strip: firm or floppy?</a:t>
-            </a:r>
-            <a:endParaRPr lang="en-US" sz="1300" dirty="0"/>
-          </a:p>
-          <a:p>
-            <a:pPr marL="342900" indent="-342900">
-              <a:spcAft>
-                <a:spcPts val="500"/>
-              </a:spcAft>
-              <a:buSzPct val="100000"/>
-              <a:buFont typeface="+mj-lt"/>
-              <a:buAutoNum type="arabicPeriod" startAt="1"/>
-            </a:pPr>
-            <a:r>
-              <a:rPr lang="en-US" sz="1300" dirty="0">
-                <a:solidFill>
-                  <a:srgbClr val="141B26"/>
-                </a:solidFill>
-              </a:rPr>
               <a:t>Explain the changes using osmosis and the words partially permeable membrane.</a:t>
             </a:r>
-            <a:endParaRPr lang="en-US" sz="1300" dirty="0"/>
+            <a:endParaRPr lang="en-US" sz="1600" dirty="0"/>
           </a:p>
         </p:txBody>
       </p:sp>
@@ -3538,16 +3534,14 @@
           <a:ln/>
         </p:spPr>
         <p:txBody>
-          <a:bodyPr wrap="square" lIns="0" tIns="0" rIns="0" bIns="0" rtlCol="0" anchor="ctr">
-            <a:normAutofit/>
-          </a:bodyPr>
+          <a:bodyPr wrap="square" lIns="0" tIns="0" rIns="0" bIns="0" rtlCol="0" anchor="ctr"/>
           <a:lstStyle/>
           <a:p>
             <a:pPr indent="0" marL="0">
               <a:buNone/>
             </a:pPr>
             <a:r>
-              <a:rPr lang="en-US" sz="1300" b="1" dirty="0">
+              <a:rPr lang="en-US" sz="1500" b="1" dirty="0">
                 <a:solidFill>
                   <a:srgbClr val="3A2E00"/>
                 </a:solidFill>
@@ -3558,14 +3552,14 @@
               <a:buNone/>
             </a:pPr>
             <a:r>
-              <a:rPr lang="en-US" sz="1300" dirty="0">
+              <a:rPr lang="en-US" sz="1500" dirty="0">
                 <a:solidFill>
                   <a:srgbClr val="3A2E00"/>
                 </a:solidFill>
               </a:rPr>
               <a:t>Knives on a board, cutting away from fingers. Wipe up spills. Wash hands.</a:t>
             </a:r>
-            <a:endParaRPr lang="en-US" sz="1300" dirty="0"/>
+            <a:endParaRPr lang="en-US" sz="1500" dirty="0"/>
           </a:p>
         </p:txBody>
       </p:sp>
@@ -3765,14 +3759,14 @@
               <a:buNone/>
             </a:pPr>
             <a:r>
-              <a:rPr lang="en-US" sz="1400" i="1" dirty="0">
+              <a:rPr lang="en-US" sz="1600" i="1" dirty="0">
                 <a:solidFill>
                   <a:srgbClr val="5B6574"/>
                 </a:solidFill>
               </a:rPr>
               <a:t>Mini whiteboards. Choose A, B, C or D. Then check any wrong answers with the Student Book.</a:t>
             </a:r>
-            <a:endParaRPr lang="en-US" sz="1400" dirty="0"/>
+            <a:endParaRPr lang="en-US" sz="1600" dirty="0"/>
           </a:p>
         </p:txBody>
       </p:sp>
@@ -3821,9 +3815,7 @@
           <a:ln/>
         </p:spPr>
         <p:txBody>
-          <a:bodyPr wrap="square" lIns="0" tIns="0" rIns="0" bIns="0" rtlCol="0" anchor="ctr">
-            <a:normAutofit/>
-          </a:bodyPr>
+          <a:bodyPr wrap="square" lIns="0" tIns="0" rIns="0" bIns="0" rtlCol="0" anchor="ctr"/>
           <a:lstStyle/>
           <a:p>
             <a:pPr indent="0" marL="0">
@@ -3897,9 +3889,7 @@
           <a:ln/>
         </p:spPr>
         <p:txBody>
-          <a:bodyPr wrap="square" lIns="0" tIns="0" rIns="0" bIns="0" rtlCol="0" anchor="ctr">
-            <a:normAutofit/>
-          </a:bodyPr>
+          <a:bodyPr wrap="square" lIns="0" tIns="0" rIns="0" bIns="0" rtlCol="0" anchor="ctr"/>
           <a:lstStyle/>
           <a:p>
             <a:pPr indent="0" marL="0">
@@ -3973,9 +3963,7 @@
           <a:ln/>
         </p:spPr>
         <p:txBody>
-          <a:bodyPr wrap="square" lIns="0" tIns="0" rIns="0" bIns="0" rtlCol="0" anchor="ctr">
-            <a:normAutofit/>
-          </a:bodyPr>
+          <a:bodyPr wrap="square" lIns="0" tIns="0" rIns="0" bIns="0" rtlCol="0" anchor="ctr"/>
           <a:lstStyle/>
           <a:p>
             <a:pPr indent="0" marL="0">
@@ -4049,9 +4037,7 @@
           <a:ln/>
         </p:spPr>
         <p:txBody>
-          <a:bodyPr wrap="square" lIns="0" tIns="0" rIns="0" bIns="0" rtlCol="0" anchor="ctr">
-            <a:normAutofit/>
-          </a:bodyPr>
+          <a:bodyPr wrap="square" lIns="0" tIns="0" rIns="0" bIns="0" rtlCol="0" anchor="ctr"/>
           <a:lstStyle/>
           <a:p>
             <a:pPr indent="0" marL="0">
@@ -4125,9 +4111,7 @@
           <a:ln/>
         </p:spPr>
         <p:txBody>
-          <a:bodyPr wrap="square" lIns="0" tIns="0" rIns="0" bIns="0" rtlCol="0" anchor="ctr">
-            <a:normAutofit/>
-          </a:bodyPr>
+          <a:bodyPr wrap="square" lIns="0" tIns="0" rIns="0" bIns="0" rtlCol="0" anchor="ctr"/>
           <a:lstStyle/>
           <a:p>
             <a:pPr indent="0" marL="0">
@@ -4201,9 +4185,7 @@
           <a:ln/>
         </p:spPr>
         <p:txBody>
-          <a:bodyPr wrap="square" lIns="0" tIns="0" rIns="0" bIns="0" rtlCol="0" anchor="ctr">
-            <a:normAutofit/>
-          </a:bodyPr>
+          <a:bodyPr wrap="square" lIns="0" tIns="0" rIns="0" bIns="0" rtlCol="0" anchor="ctr"/>
           <a:lstStyle/>
           <a:p>
             <a:pPr indent="0" marL="0">
@@ -4421,23 +4403,21 @@
           <a:ln/>
         </p:spPr>
         <p:txBody>
-          <a:bodyPr wrap="square" lIns="0" tIns="0" rIns="0" bIns="0" rtlCol="0" anchor="t">
-            <a:normAutofit/>
-          </a:bodyPr>
+          <a:bodyPr wrap="square" lIns="0" tIns="0" rIns="0" bIns="0" rtlCol="0" anchor="t"/>
           <a:lstStyle/>
           <a:p>
             <a:pPr indent="0" marL="0">
               <a:buNone/>
             </a:pPr>
             <a:r>
-              <a:rPr lang="en-US" sz="2200" b="1" dirty="0">
+              <a:rPr lang="en-US" sz="2600" b="1" dirty="0">
                 <a:solidFill>
                   <a:srgbClr val="0F2A5F"/>
                 </a:solidFill>
               </a:rPr>
               <a:t>In 1918 a flu pandemic took months to cross the world. In 2020 a new virus reached every continent within weeks. Explain why rapid international travel makes a pandemic more likely.</a:t>
             </a:r>
-            <a:endParaRPr lang="en-US" sz="2200" dirty="0"/>
+            <a:endParaRPr lang="en-US" sz="2600" dirty="0"/>
           </a:p>
         </p:txBody>
       </p:sp>
@@ -4486,9 +4466,7 @@
           <a:ln/>
         </p:spPr>
         <p:txBody>
-          <a:bodyPr wrap="square" lIns="0" tIns="0" rIns="0" bIns="0" rtlCol="0" anchor="t">
-            <a:normAutofit/>
-          </a:bodyPr>
+          <a:bodyPr wrap="square" lIns="0" tIns="0" rIns="0" bIns="0" rtlCol="0" anchor="t"/>
           <a:lstStyle/>
           <a:p>
             <a:pPr indent="0" marL="0">
@@ -4498,14 +4476,14 @@
               <a:buNone/>
             </a:pPr>
             <a:r>
-              <a:rPr lang="en-US" sz="1500" b="1" dirty="0">
+              <a:rPr lang="en-US" sz="1800" b="1" dirty="0">
                 <a:solidFill>
                   <a:srgbClr val="7B3A8E"/>
                 </a:solidFill>
               </a:rPr>
               <a:t>Sentence frames</a:t>
             </a:r>
-            <a:endParaRPr lang="en-US" sz="1500" dirty="0"/>
+            <a:endParaRPr lang="en-US" sz="1800" dirty="0"/>
           </a:p>
           <a:p>
             <a:pPr indent="0" marL="0">
@@ -4515,14 +4493,14 @@
               <a:buNone/>
             </a:pPr>
             <a:r>
-              <a:rPr lang="en-US" sz="1500" dirty="0">
+              <a:rPr lang="en-US" sz="1800" dirty="0">
                 <a:solidFill>
                   <a:srgbClr val="141B26"/>
                 </a:solidFill>
               </a:rPr>
               <a:t>A pandemic is ___.</a:t>
             </a:r>
-            <a:endParaRPr lang="en-US" sz="1500" dirty="0"/>
+            <a:endParaRPr lang="en-US" sz="1800" dirty="0"/>
           </a:p>
           <a:p>
             <a:pPr indent="0" marL="0">
@@ -4532,14 +4510,14 @@
               <a:buNone/>
             </a:pPr>
             <a:r>
-              <a:rPr lang="en-US" sz="1500" dirty="0">
+              <a:rPr lang="en-US" sz="1800" dirty="0">
                 <a:solidFill>
                   <a:srgbClr val="141B26"/>
                 </a:solidFill>
               </a:rPr>
               <a:t>An infected person can ___ before they ___, so ___.</a:t>
             </a:r>
-            <a:endParaRPr lang="en-US" sz="1500" dirty="0"/>
+            <a:endParaRPr lang="en-US" sz="1800" dirty="0"/>
           </a:p>
           <a:p>
             <a:pPr indent="0" marL="0">
@@ -4549,14 +4527,14 @@
               <a:buNone/>
             </a:pPr>
             <a:r>
-              <a:rPr lang="en-US" sz="1500" dirty="0">
+              <a:rPr lang="en-US" sz="1800" dirty="0">
                 <a:solidFill>
                   <a:srgbClr val="141B26"/>
                 </a:solidFill>
               </a:rPr>
               <a:t>To slow a pandemic, countries could ___.</a:t>
             </a:r>
-            <a:endParaRPr lang="en-US" sz="1500" dirty="0"/>
+            <a:endParaRPr lang="en-US" sz="1800" dirty="0"/>
           </a:p>
         </p:txBody>
       </p:sp>
@@ -4756,14 +4734,14 @@
               <a:buNone/>
             </a:pPr>
             <a:r>
-              <a:rPr lang="en-US" sz="1400" i="1" dirty="0">
+              <a:rPr lang="en-US" sz="1600" i="1" dirty="0">
                 <a:solidFill>
                   <a:srgbClr val="5B6574"/>
                 </a:solidFill>
               </a:rPr>
               <a:t>On your worksheet exit ticket. Work alone. Hand it in as you leave.</a:t>
             </a:r>
-            <a:endParaRPr lang="en-US" sz="1400" dirty="0"/>
+            <a:endParaRPr lang="en-US" sz="1600" dirty="0"/>
           </a:p>
         </p:txBody>
       </p:sp>
@@ -4776,7 +4754,7 @@
         <p:spPr>
           <a:xfrm>
             <a:off x="548640" y="1828800"/>
-            <a:ext cx="10881360" cy="1188720"/>
+            <a:ext cx="9692640" cy="1188720"/>
           </a:xfrm>
           <a:prstGeom prst="rect">
             <a:avLst/>
@@ -4785,16 +4763,14 @@
           <a:ln/>
         </p:spPr>
         <p:txBody>
-          <a:bodyPr wrap="square" lIns="0" tIns="0" rIns="0" bIns="0" rtlCol="0" anchor="t">
-            <a:normAutofit/>
-          </a:bodyPr>
+          <a:bodyPr wrap="square" lIns="0" tIns="0" rIns="0" bIns="0" rtlCol="0" anchor="t"/>
           <a:lstStyle/>
           <a:p>
             <a:pPr indent="0" marL="0">
               <a:buNone/>
             </a:pPr>
             <a:r>
-              <a:rPr lang="en-US" sz="1800" b="1" dirty="0">
+              <a:rPr lang="en-US" sz="2200" b="1" dirty="0">
                 <a:solidFill>
                   <a:srgbClr val="7B3A8E"/>
                 </a:solidFill>
@@ -4805,14 +4781,14 @@
               <a:buNone/>
             </a:pPr>
             <a:r>
-              <a:rPr lang="en-US" sz="1800" dirty="0">
+              <a:rPr lang="en-US" sz="2200" dirty="0">
                 <a:solidFill>
                   <a:srgbClr val="141B26"/>
                 </a:solidFill>
               </a:rPr>
               <a:t>What is osmosis?</a:t>
             </a:r>
-            <a:endParaRPr lang="en-US" sz="1800" dirty="0"/>
+            <a:endParaRPr lang="en-US" sz="2200" dirty="0"/>
           </a:p>
         </p:txBody>
       </p:sp>
@@ -4825,7 +4801,7 @@
         <p:spPr>
           <a:xfrm>
             <a:off x="548640" y="3017520"/>
-            <a:ext cx="10881360" cy="1188720"/>
+            <a:ext cx="9692640" cy="1188720"/>
           </a:xfrm>
           <a:prstGeom prst="rect">
             <a:avLst/>
@@ -4834,16 +4810,14 @@
           <a:ln/>
         </p:spPr>
         <p:txBody>
-          <a:bodyPr wrap="square" lIns="0" tIns="0" rIns="0" bIns="0" rtlCol="0" anchor="t">
-            <a:normAutofit/>
-          </a:bodyPr>
+          <a:bodyPr wrap="square" lIns="0" tIns="0" rIns="0" bIns="0" rtlCol="0" anchor="t"/>
           <a:lstStyle/>
           <a:p>
             <a:pPr indent="0" marL="0">
               <a:buNone/>
             </a:pPr>
             <a:r>
-              <a:rPr lang="en-US" sz="1800" b="1" dirty="0">
+              <a:rPr lang="en-US" sz="2200" b="1" dirty="0">
                 <a:solidFill>
                   <a:srgbClr val="7B3A8E"/>
                 </a:solidFill>
@@ -4854,14 +4828,14 @@
               <a:buNone/>
             </a:pPr>
             <a:r>
-              <a:rPr lang="en-US" sz="1800" dirty="0">
+              <a:rPr lang="en-US" sz="2200" dirty="0">
                 <a:solidFill>
                   <a:srgbClr val="141B26"/>
                 </a:solidFill>
               </a:rPr>
               <a:t>A 2 cm cube has a surface area of 24 cm2 and a volume of 8 cm3. State its surface area : volume ratio.</a:t>
             </a:r>
-            <a:endParaRPr lang="en-US" sz="1800" dirty="0"/>
+            <a:endParaRPr lang="en-US" sz="2200" dirty="0"/>
           </a:p>
         </p:txBody>
       </p:sp>
@@ -4874,7 +4848,7 @@
         <p:spPr>
           <a:xfrm>
             <a:off x="548640" y="4206240"/>
-            <a:ext cx="10881360" cy="1188720"/>
+            <a:ext cx="9692640" cy="1188720"/>
           </a:xfrm>
           <a:prstGeom prst="rect">
             <a:avLst/>
@@ -4883,16 +4857,14 @@
           <a:ln/>
         </p:spPr>
         <p:txBody>
-          <a:bodyPr wrap="square" lIns="0" tIns="0" rIns="0" bIns="0" rtlCol="0" anchor="t">
-            <a:normAutofit/>
-          </a:bodyPr>
+          <a:bodyPr wrap="square" lIns="0" tIns="0" rIns="0" bIns="0" rtlCol="0" anchor="t"/>
           <a:lstStyle/>
           <a:p>
             <a:pPr indent="0" marL="0">
               <a:buNone/>
             </a:pPr>
             <a:r>
-              <a:rPr lang="en-US" sz="1800" b="1" dirty="0">
+              <a:rPr lang="en-US" sz="2200" b="1" dirty="0">
                 <a:solidFill>
                   <a:srgbClr val="7B3A8E"/>
                 </a:solidFill>
@@ -4903,14 +4875,14 @@
               <a:buNone/>
             </a:pPr>
             <a:r>
-              <a:rPr lang="en-US" sz="1800" dirty="0">
+              <a:rPr lang="en-US" sz="2200" dirty="0">
                 <a:solidFill>
                   <a:srgbClr val="141B26"/>
                 </a:solidFill>
               </a:rPr>
               <a:t>Give one reason why rapid international travel makes a pandemic more likely.</a:t>
             </a:r>
-            <a:endParaRPr lang="en-US" sz="1800" dirty="0"/>
+            <a:endParaRPr lang="en-US" sz="2200" dirty="0"/>
           </a:p>
         </p:txBody>
       </p:sp>
@@ -5169,7 +5141,7 @@
         <p:spPr>
           <a:xfrm>
             <a:off x="548640" y="1371600"/>
-            <a:ext cx="10881360" cy="4480560"/>
+            <a:ext cx="10881360" cy="4114800"/>
           </a:xfrm>
           <a:prstGeom prst="rect">
             <a:avLst/>
@@ -5178,81 +5150,79 @@
           <a:ln/>
         </p:spPr>
         <p:txBody>
-          <a:bodyPr wrap="square" lIns="0" tIns="0" rIns="0" bIns="0" rtlCol="0" anchor="t">
-            <a:normAutofit/>
-          </a:bodyPr>
+          <a:bodyPr wrap="square" lIns="0" tIns="0" rIns="0" bIns="0" rtlCol="0" anchor="t"/>
           <a:lstStyle/>
           <a:p>
             <a:pPr marL="342900" indent="-342900">
               <a:spcAft>
-                <a:spcPts val="1000"/>
+                <a:spcPts val="1200"/>
               </a:spcAft>
               <a:buSzPct val="100000"/>
               <a:buChar char="✓"/>
             </a:pPr>
             <a:r>
-              <a:rPr lang="en-US" sz="1700" dirty="0">
+              <a:rPr lang="en-US" sz="2000" dirty="0">
                 <a:solidFill>
                   <a:srgbClr val="141B26"/>
                 </a:solidFill>
               </a:rPr>
               <a:t>Surface area : volume ratio gets smaller as organisms get bigger, so large organisms need organs with big surfaces and transport systems.</a:t>
             </a:r>
-            <a:endParaRPr lang="en-US" sz="1700" dirty="0"/>
+            <a:endParaRPr lang="en-US" sz="2000" dirty="0"/>
           </a:p>
           <a:p>
             <a:pPr marL="342900" indent="-342900">
               <a:spcAft>
-                <a:spcPts val="1000"/>
+                <a:spcPts val="1200"/>
               </a:spcAft>
               <a:buSzPct val="100000"/>
               <a:buChar char="✓"/>
             </a:pPr>
             <a:r>
-              <a:rPr lang="en-US" sz="1700" dirty="0">
+              <a:rPr lang="en-US" sz="2000" dirty="0">
                 <a:solidFill>
                   <a:srgbClr val="141B26"/>
                 </a:solidFill>
               </a:rPr>
               <a:t>Diffusion is the net movement of particles down a concentration gradient; faster when warmer and when the gradient is steeper.</a:t>
             </a:r>
-            <a:endParaRPr lang="en-US" sz="1700" dirty="0"/>
+            <a:endParaRPr lang="en-US" sz="2000" dirty="0"/>
           </a:p>
           <a:p>
             <a:pPr marL="342900" indent="-342900">
               <a:spcAft>
-                <a:spcPts val="1000"/>
+                <a:spcPts val="1200"/>
               </a:spcAft>
               <a:buSzPct val="100000"/>
               <a:buChar char="✓"/>
             </a:pPr>
             <a:r>
-              <a:rPr lang="en-US" sz="1700" dirty="0">
+              <a:rPr lang="en-US" sz="2000" dirty="0">
                 <a:solidFill>
                   <a:srgbClr val="141B26"/>
                 </a:solidFill>
               </a:rPr>
               <a:t>Osmosis is the diffusion of water through a partially permeable membrane.</a:t>
             </a:r>
-            <a:endParaRPr lang="en-US" sz="1700" dirty="0"/>
+            <a:endParaRPr lang="en-US" sz="2000" dirty="0"/>
           </a:p>
           <a:p>
             <a:pPr marL="342900" indent="-342900">
               <a:spcAft>
-                <a:spcPts val="1000"/>
+                <a:spcPts val="1200"/>
               </a:spcAft>
               <a:buSzPct val="100000"/>
               <a:buChar char="✓"/>
             </a:pPr>
             <a:r>
-              <a:rPr lang="en-US" sz="1700" dirty="0">
+              <a:rPr lang="en-US" sz="2000" dirty="0">
                 <a:solidFill>
                   <a:srgbClr val="141B26"/>
                 </a:solidFill>
               </a:rPr>
               <a:t>Unit review: pathogens, immunity, nerves and hormones, treatments, statistics and ecology all help us understand and fight disease.</a:t>
             </a:r>
-            <a:endParaRPr lang="en-US" sz="1700" dirty="0"/>
+            <a:endParaRPr lang="en-US" sz="2000" dirty="0"/>
           </a:p>
         </p:txBody>
       </p:sp>
@@ -5281,7 +5251,7 @@
               <a:buNone/>
             </a:pPr>
             <a:r>
-              <a:rPr lang="en-US" sz="1300" b="1" dirty="0">
+              <a:rPr lang="en-US" sz="1400" b="1" dirty="0">
                 <a:solidFill>
                   <a:srgbClr val="7B3A8E"/>
                 </a:solidFill>
@@ -5292,14 +5262,14 @@
               <a:buNone/>
             </a:pPr>
             <a:r>
-              <a:rPr lang="en-US" sz="1300" dirty="0">
+              <a:rPr lang="en-US" sz="1400" dirty="0">
                 <a:solidFill>
                   <a:srgbClr val="141B26"/>
                 </a:solidFill>
               </a:rPr>
               <a:t>End of 9C. Revise the unit with Workbook pages 27 to 38 and the key words boxes on your worksheets.</a:t>
             </a:r>
-            <a:endParaRPr lang="en-US" sz="1300" dirty="0"/>
+            <a:endParaRPr lang="en-US" sz="1400" dirty="0"/>
           </a:p>
         </p:txBody>
       </p:sp>
@@ -5567,77 +5537,75 @@
           <a:ln/>
         </p:spPr>
         <p:txBody>
-          <a:bodyPr wrap="square" lIns="0" tIns="0" rIns="0" bIns="0" rtlCol="0" anchor="t">
-            <a:normAutofit/>
-          </a:bodyPr>
+          <a:bodyPr wrap="square" lIns="0" tIns="0" rIns="0" bIns="0" rtlCol="0" anchor="t"/>
           <a:lstStyle/>
           <a:p>
             <a:pPr indent="0" marL="0">
               <a:spcAft>
-                <a:spcPts val="1000"/>
+                <a:spcPts val="1200"/>
               </a:spcAft>
               <a:buNone/>
             </a:pPr>
             <a:r>
-              <a:rPr lang="en-US" sz="2000" dirty="0">
+              <a:rPr lang="en-US" sz="2400" dirty="0">
                 <a:solidFill>
                   <a:srgbClr val="141B26"/>
                 </a:solidFill>
               </a:rPr>
               <a:t>A cube has sides of 1 cm.</a:t>
             </a:r>
-            <a:endParaRPr lang="en-US" sz="2000" dirty="0"/>
+            <a:endParaRPr lang="en-US" sz="2400" dirty="0"/>
           </a:p>
           <a:p>
             <a:pPr indent="0" marL="0">
               <a:spcAft>
-                <a:spcPts val="1000"/>
+                <a:spcPts val="1200"/>
               </a:spcAft>
               <a:buNone/>
             </a:pPr>
             <a:r>
-              <a:rPr lang="en-US" sz="2000" dirty="0">
+              <a:rPr lang="en-US" sz="2400" dirty="0">
                 <a:solidFill>
                   <a:srgbClr val="141B26"/>
                 </a:solidFill>
               </a:rPr>
               <a:t>1. Calculate its surface area. (It has 6 faces.)</a:t>
             </a:r>
-            <a:endParaRPr lang="en-US" sz="2000" dirty="0"/>
+            <a:endParaRPr lang="en-US" sz="2400" dirty="0"/>
           </a:p>
           <a:p>
             <a:pPr indent="0" marL="0">
               <a:spcAft>
-                <a:spcPts val="1000"/>
+                <a:spcPts val="1200"/>
               </a:spcAft>
               <a:buNone/>
             </a:pPr>
             <a:r>
-              <a:rPr lang="en-US" sz="2000" dirty="0">
+              <a:rPr lang="en-US" sz="2400" dirty="0">
                 <a:solidFill>
                   <a:srgbClr val="141B26"/>
                 </a:solidFill>
               </a:rPr>
               <a:t>2. Calculate its volume.</a:t>
             </a:r>
-            <a:endParaRPr lang="en-US" sz="2000" dirty="0"/>
+            <a:endParaRPr lang="en-US" sz="2400" dirty="0"/>
           </a:p>
           <a:p>
             <a:pPr indent="0" marL="0">
               <a:spcAft>
-                <a:spcPts val="1000"/>
+                <a:spcPts val="1200"/>
               </a:spcAft>
               <a:buNone/>
             </a:pPr>
             <a:r>
-              <a:rPr lang="en-US" sz="2000" dirty="0">
+              <a:rPr lang="en-US" sz="2400" dirty="0">
                 <a:solidFill>
                   <a:srgbClr val="141B26"/>
                 </a:solidFill>
               </a:rPr>
               <a:t>3. Which gas diffuses into cells so they can respire?</a:t>
             </a:r>
-            <a:endParaRPr lang="en-US" sz="2000" dirty="0"/>
+            <a:endParaRPr lang="en-US" sz="2400" dirty="0"/>
           </a:p>
         </p:txBody>
       </p:sp>
@@ -5820,8 +5788,8 @@
         </p:nvSpPr>
         <p:spPr>
           <a:xfrm>
-            <a:off x="548640" y="1325880"/>
-            <a:ext cx="5669280" cy="457200"/>
+            <a:off x="548640" y="1280160"/>
+            <a:ext cx="5486400" cy="411480"/>
           </a:xfrm>
           <a:prstGeom prst="rect">
             <a:avLst/>
@@ -5837,14 +5805,14 @@
               <a:buNone/>
             </a:pPr>
             <a:r>
-              <a:rPr lang="en-US" sz="2000" b="1" dirty="0">
+              <a:rPr lang="en-US" sz="2200" b="1" dirty="0">
                 <a:solidFill>
                   <a:srgbClr val="7B3A8E"/>
                 </a:solidFill>
               </a:rPr>
               <a:t>Today I can ...</a:t>
             </a:r>
-            <a:endParaRPr lang="en-US" sz="2000" dirty="0"/>
+            <a:endParaRPr lang="en-US" sz="2200" dirty="0"/>
           </a:p>
         </p:txBody>
       </p:sp>
@@ -5856,8 +5824,8 @@
         </p:nvSpPr>
         <p:spPr>
           <a:xfrm>
-            <a:off x="594360" y="1947672"/>
-            <a:ext cx="292608" cy="292608"/>
+            <a:off x="594360" y="1810512"/>
+            <a:ext cx="310896" cy="310896"/>
           </a:xfrm>
           <a:prstGeom prst="rect">
             <a:avLst/>
@@ -5881,8 +5849,8 @@
         </p:nvSpPr>
         <p:spPr>
           <a:xfrm>
-            <a:off x="1051560" y="1874520"/>
-            <a:ext cx="5120640" cy="868680"/>
+            <a:off x="1097280" y="1737360"/>
+            <a:ext cx="10332720" cy="868680"/>
           </a:xfrm>
           <a:prstGeom prst="rect">
             <a:avLst/>
@@ -5891,23 +5859,21 @@
           <a:ln/>
         </p:spPr>
         <p:txBody>
-          <a:bodyPr wrap="square" lIns="0" tIns="0" rIns="0" bIns="0" rtlCol="0" anchor="t">
-            <a:normAutofit/>
-          </a:bodyPr>
+          <a:bodyPr wrap="square" lIns="0" tIns="0" rIns="0" bIns="0" rtlCol="0" anchor="t"/>
           <a:lstStyle/>
           <a:p>
             <a:pPr indent="0" marL="0">
               <a:buNone/>
             </a:pPr>
             <a:r>
-              <a:rPr lang="en-US" sz="1600" dirty="0">
+              <a:rPr lang="en-US" sz="2000" dirty="0">
                 <a:solidFill>
                   <a:srgbClr val="141B26"/>
                 </a:solidFill>
               </a:rPr>
               <a:t>I can calculate a surface area : volume ratio and explain why it matters for cells and organisms.</a:t>
             </a:r>
-            <a:endParaRPr lang="en-US" sz="1600" dirty="0"/>
+            <a:endParaRPr lang="en-US" sz="2000" dirty="0"/>
           </a:p>
         </p:txBody>
       </p:sp>
@@ -5919,8 +5885,8 @@
         </p:nvSpPr>
         <p:spPr>
           <a:xfrm>
-            <a:off x="594360" y="2907792"/>
-            <a:ext cx="292608" cy="292608"/>
+            <a:off x="594360" y="2679192"/>
+            <a:ext cx="310896" cy="310896"/>
           </a:xfrm>
           <a:prstGeom prst="rect">
             <a:avLst/>
@@ -5944,8 +5910,8 @@
         </p:nvSpPr>
         <p:spPr>
           <a:xfrm>
-            <a:off x="1051560" y="2834640"/>
-            <a:ext cx="5120640" cy="868680"/>
+            <a:off x="1097280" y="2606040"/>
+            <a:ext cx="10332720" cy="868680"/>
           </a:xfrm>
           <a:prstGeom prst="rect">
             <a:avLst/>
@@ -5954,23 +5920,21 @@
           <a:ln/>
         </p:spPr>
         <p:txBody>
-          <a:bodyPr wrap="square" lIns="0" tIns="0" rIns="0" bIns="0" rtlCol="0" anchor="t">
-            <a:normAutofit/>
-          </a:bodyPr>
+          <a:bodyPr wrap="square" lIns="0" tIns="0" rIns="0" bIns="0" rtlCol="0" anchor="t"/>
           <a:lstStyle/>
           <a:p>
             <a:pPr indent="0" marL="0">
               <a:buNone/>
             </a:pPr>
             <a:r>
-              <a:rPr lang="en-US" sz="1600" dirty="0">
+              <a:rPr lang="en-US" sz="2000" dirty="0">
                 <a:solidFill>
                   <a:srgbClr val="141B26"/>
                 </a:solidFill>
               </a:rPr>
               <a:t>I can describe how osmosis happens through a partially permeable membrane and use it to explain what I see.</a:t>
             </a:r>
-            <a:endParaRPr lang="en-US" sz="1600" dirty="0"/>
+            <a:endParaRPr lang="en-US" sz="2000" dirty="0"/>
           </a:p>
         </p:txBody>
       </p:sp>
@@ -5982,8 +5946,8 @@
         </p:nvSpPr>
         <p:spPr>
           <a:xfrm>
-            <a:off x="6583680" y="1325880"/>
-            <a:ext cx="5029200" cy="457200"/>
+            <a:off x="548640" y="3611880"/>
+            <a:ext cx="5486400" cy="411480"/>
           </a:xfrm>
           <a:prstGeom prst="rect">
             <a:avLst/>
@@ -5999,14 +5963,14 @@
               <a:buNone/>
             </a:pPr>
             <a:r>
-              <a:rPr lang="en-US" sz="2000" b="1" dirty="0">
+              <a:rPr lang="en-US" sz="2200" b="1" dirty="0">
                 <a:solidFill>
                   <a:srgbClr val="7B3A8E"/>
                 </a:solidFill>
               </a:rPr>
               <a:t>Key words today</a:t>
             </a:r>
-            <a:endParaRPr lang="en-US" sz="2000" dirty="0"/>
+            <a:endParaRPr lang="en-US" sz="2200" dirty="0"/>
           </a:p>
         </p:txBody>
       </p:sp>
@@ -6018,8 +5982,8 @@
         </p:nvSpPr>
         <p:spPr>
           <a:xfrm>
-            <a:off x="6583680" y="1874520"/>
-            <a:ext cx="5029200" cy="4023360"/>
+            <a:off x="548640" y="4069080"/>
+            <a:ext cx="3515258" cy="1920240"/>
           </a:xfrm>
           <a:prstGeom prst="rect">
             <a:avLst/>
@@ -6028,350 +5992,285 @@
           <a:ln/>
         </p:spPr>
         <p:txBody>
-          <a:bodyPr wrap="square" lIns="0" tIns="0" rIns="0" bIns="0" rtlCol="0" anchor="t">
-            <a:normAutofit/>
-          </a:bodyPr>
+          <a:bodyPr wrap="square" lIns="0" tIns="0" rIns="0" bIns="0" rtlCol="0" anchor="t"/>
+          <a:lstStyle/>
+          <a:p>
+            <a:pPr marL="304800" indent="-304800">
+              <a:spcAft>
+                <a:spcPts val="600"/>
+              </a:spcAft>
+              <a:buSzPct val="100000"/>
+              <a:buChar char="•"/>
+            </a:pPr>
+            <a:r>
+              <a:rPr lang="en-US" sz="2100" b="1" dirty="0">
+                <a:solidFill>
+                  <a:srgbClr val="0F2A5F"/>
+                </a:solidFill>
+              </a:rPr>
+              <a:t>surface area</a:t>
+            </a:r>
+            <a:endParaRPr lang="en-US" sz="2100" dirty="0"/>
+          </a:p>
+          <a:p>
+            <a:pPr marL="304800" indent="-304800">
+              <a:spcAft>
+                <a:spcPts val="600"/>
+              </a:spcAft>
+              <a:buSzPct val="100000"/>
+              <a:buChar char="•"/>
+            </a:pPr>
+            <a:r>
+              <a:rPr lang="en-US" sz="2100" b="1" dirty="0">
+                <a:solidFill>
+                  <a:srgbClr val="0F2A5F"/>
+                </a:solidFill>
+              </a:rPr>
+              <a:t>volume</a:t>
+            </a:r>
+            <a:endParaRPr lang="en-US" sz="2100" dirty="0"/>
+          </a:p>
+          <a:p>
+            <a:pPr marL="304800" indent="-304800">
+              <a:spcAft>
+                <a:spcPts val="600"/>
+              </a:spcAft>
+              <a:buSzPct val="100000"/>
+              <a:buChar char="•"/>
+            </a:pPr>
+            <a:r>
+              <a:rPr lang="en-US" sz="2100" b="1" dirty="0">
+                <a:solidFill>
+                  <a:srgbClr val="0F2A5F"/>
+                </a:solidFill>
+              </a:rPr>
+              <a:t>ratio</a:t>
+            </a:r>
+            <a:endParaRPr lang="en-US" sz="2100" dirty="0"/>
+          </a:p>
+          <a:p>
+            <a:pPr marL="304800" indent="-304800">
+              <a:spcAft>
+                <a:spcPts val="600"/>
+              </a:spcAft>
+              <a:buSzPct val="100000"/>
+              <a:buChar char="•"/>
+            </a:pPr>
+            <a:r>
+              <a:rPr lang="en-US" sz="2100" b="1" dirty="0">
+                <a:solidFill>
+                  <a:srgbClr val="0F2A5F"/>
+                </a:solidFill>
+              </a:rPr>
+              <a:t>diffusion</a:t>
+            </a:r>
+            <a:endParaRPr lang="en-US" sz="2100" dirty="0"/>
+          </a:p>
+        </p:txBody>
+      </p:sp>
+      <p:sp>
+        <p:nvSpPr>
+          <p:cNvPr id="12" name="Text 10"/>
+          <p:cNvSpPr txBox="1"/>
+          <p:nvPr/>
+        </p:nvSpPr>
+        <p:spPr>
+          <a:xfrm>
+            <a:off x="4338218" y="4069080"/>
+            <a:ext cx="3515258" cy="1920240"/>
+          </a:xfrm>
+          <a:prstGeom prst="rect">
+            <a:avLst/>
+          </a:prstGeom>
+          <a:noFill/>
+          <a:ln/>
+        </p:spPr>
+        <p:txBody>
+          <a:bodyPr wrap="square" lIns="0" tIns="0" rIns="0" bIns="0" rtlCol="0" anchor="t"/>
+          <a:lstStyle/>
+          <a:p>
+            <a:pPr marL="304800" indent="-304800">
+              <a:spcAft>
+                <a:spcPts val="600"/>
+              </a:spcAft>
+              <a:buSzPct val="100000"/>
+              <a:buChar char="•"/>
+            </a:pPr>
+            <a:r>
+              <a:rPr lang="en-US" sz="1800" b="1" dirty="0">
+                <a:solidFill>
+                  <a:srgbClr val="0F2A5F"/>
+                </a:solidFill>
+              </a:rPr>
+              <a:t>concentration gradient</a:t>
+            </a:r>
+            <a:endParaRPr lang="en-US" sz="1800" dirty="0"/>
+          </a:p>
+          <a:p>
+            <a:pPr marL="304800" indent="-304800">
+              <a:spcAft>
+                <a:spcPts val="600"/>
+              </a:spcAft>
+              <a:buSzPct val="100000"/>
+              <a:buChar char="•"/>
+            </a:pPr>
+            <a:r>
+              <a:rPr lang="en-US" sz="1800" b="1" dirty="0">
+                <a:solidFill>
+                  <a:srgbClr val="0F2A5F"/>
+                </a:solidFill>
+              </a:rPr>
+              <a:t>osmosis</a:t>
+            </a:r>
+            <a:endParaRPr lang="en-US" sz="1800" dirty="0"/>
+          </a:p>
+          <a:p>
+            <a:pPr marL="304800" indent="-304800">
+              <a:spcAft>
+                <a:spcPts val="600"/>
+              </a:spcAft>
+              <a:buSzPct val="100000"/>
+              <a:buChar char="•"/>
+            </a:pPr>
+            <a:r>
+              <a:rPr lang="en-US" sz="1800" b="1" dirty="0">
+                <a:solidFill>
+                  <a:srgbClr val="0F2A5F"/>
+                </a:solidFill>
+              </a:rPr>
+              <a:t>partially permeable membrane</a:t>
+            </a:r>
+            <a:endParaRPr lang="en-US" sz="1800" dirty="0"/>
+          </a:p>
+          <a:p>
+            <a:pPr marL="304800" indent="-304800">
+              <a:spcAft>
+                <a:spcPts val="600"/>
+              </a:spcAft>
+              <a:buSzPct val="100000"/>
+              <a:buChar char="•"/>
+            </a:pPr>
+            <a:r>
+              <a:rPr lang="en-US" sz="1800" b="1" dirty="0">
+                <a:solidFill>
+                  <a:srgbClr val="0F2A5F"/>
+                </a:solidFill>
+              </a:rPr>
+              <a:t>cell membrane</a:t>
+            </a:r>
+            <a:endParaRPr lang="en-US" sz="1800" dirty="0"/>
+          </a:p>
+        </p:txBody>
+      </p:sp>
+      <p:sp>
+        <p:nvSpPr>
+          <p:cNvPr id="13" name="Text 11"/>
+          <p:cNvSpPr txBox="1"/>
+          <p:nvPr/>
+        </p:nvSpPr>
+        <p:spPr>
+          <a:xfrm>
+            <a:off x="8127797" y="4069080"/>
+            <a:ext cx="3515258" cy="1920240"/>
+          </a:xfrm>
+          <a:prstGeom prst="rect">
+            <a:avLst/>
+          </a:prstGeom>
+          <a:noFill/>
+          <a:ln/>
+        </p:spPr>
+        <p:txBody>
+          <a:bodyPr wrap="square" lIns="0" tIns="0" rIns="0" bIns="0" rtlCol="0" anchor="t"/>
+          <a:lstStyle/>
+          <a:p>
+            <a:pPr marL="304800" indent="-304800">
+              <a:spcAft>
+                <a:spcPts val="600"/>
+              </a:spcAft>
+              <a:buSzPct val="100000"/>
+              <a:buChar char="•"/>
+            </a:pPr>
+            <a:r>
+              <a:rPr lang="en-US" sz="2200" b="1" dirty="0">
+                <a:solidFill>
+                  <a:srgbClr val="0F2A5F"/>
+                </a:solidFill>
+              </a:rPr>
+              <a:t>unicellular</a:t>
+            </a:r>
+            <a:endParaRPr lang="en-US" sz="2200" dirty="0"/>
+          </a:p>
+          <a:p>
+            <a:pPr marL="304800" indent="-304800">
+              <a:spcAft>
+                <a:spcPts val="600"/>
+              </a:spcAft>
+              <a:buSzPct val="100000"/>
+              <a:buChar char="•"/>
+            </a:pPr>
+            <a:r>
+              <a:rPr lang="en-US" sz="2200" b="1" dirty="0">
+                <a:solidFill>
+                  <a:srgbClr val="0F2A5F"/>
+                </a:solidFill>
+              </a:rPr>
+              <a:t>villi</a:t>
+            </a:r>
+            <a:endParaRPr lang="en-US" sz="2200" dirty="0"/>
+          </a:p>
+          <a:p>
+            <a:pPr marL="304800" indent="-304800">
+              <a:spcAft>
+                <a:spcPts val="600"/>
+              </a:spcAft>
+              <a:buSzPct val="100000"/>
+              <a:buChar char="•"/>
+            </a:pPr>
+            <a:r>
+              <a:rPr lang="en-US" sz="2200" b="1" dirty="0">
+                <a:solidFill>
+                  <a:srgbClr val="0F2A5F"/>
+                </a:solidFill>
+              </a:rPr>
+              <a:t>pandemic</a:t>
+            </a:r>
+            <a:endParaRPr lang="en-US" sz="2200" dirty="0"/>
+          </a:p>
+        </p:txBody>
+      </p:sp>
+      <p:sp>
+        <p:nvSpPr>
+          <p:cNvPr id="14" name="Text 12"/>
+          <p:cNvSpPr txBox="1"/>
+          <p:nvPr/>
+        </p:nvSpPr>
+        <p:spPr>
+          <a:xfrm>
+            <a:off x="548640" y="6035040"/>
+            <a:ext cx="10881360" cy="320040"/>
+          </a:xfrm>
+          <a:prstGeom prst="rect">
+            <a:avLst/>
+          </a:prstGeom>
+          <a:noFill/>
+          <a:ln/>
+        </p:spPr>
+        <p:txBody>
+          <a:bodyPr wrap="square" lIns="0" tIns="0" rIns="0" bIns="0" rtlCol="0" anchor="ctr"/>
           <a:lstStyle/>
           <a:p>
             <a:pPr indent="0" marL="0">
-              <a:spcAft>
-                <a:spcPts val="500"/>
-              </a:spcAft>
-              <a:buNone/>
-            </a:pPr>
-            <a:r>
-              <a:rPr lang="en-US" sz="1300" b="1" dirty="0">
-                <a:solidFill>
-                  <a:srgbClr val="0F2A5F"/>
-                </a:solidFill>
-              </a:rPr>
-              <a:t>surface area</a:t>
-            </a:r>
-            <a:pPr indent="0" marL="0">
-              <a:spcAft>
-                <a:spcPts val="500"/>
-              </a:spcAft>
-              <a:buNone/>
-            </a:pPr>
-            <a:r>
-              <a:rPr lang="en-US" sz="1300" dirty="0">
-                <a:solidFill>
-                  <a:srgbClr val="141B26"/>
-                </a:solidFill>
-              </a:rPr>
-              <a:t>  the total area of the outside of an object</a:t>
-            </a:r>
-            <a:endParaRPr lang="en-US" sz="1300" dirty="0"/>
-          </a:p>
-          <a:p>
-            <a:pPr indent="0" marL="0">
-              <a:spcAft>
-                <a:spcPts val="500"/>
-              </a:spcAft>
-              <a:buNone/>
-            </a:pPr>
-            <a:r>
-              <a:rPr lang="en-US" sz="1300" b="1" dirty="0">
-                <a:solidFill>
-                  <a:srgbClr val="0F2A5F"/>
-                </a:solidFill>
-              </a:rPr>
-              <a:t>volume</a:t>
-            </a:r>
-            <a:pPr indent="0" marL="0">
-              <a:spcAft>
-                <a:spcPts val="500"/>
-              </a:spcAft>
-              <a:buNone/>
-            </a:pPr>
-            <a:r>
-              <a:rPr lang="en-US" sz="1300" dirty="0">
-                <a:solidFill>
-                  <a:srgbClr val="141B26"/>
-                </a:solidFill>
-              </a:rPr>
-              <a:t>  the amount of space an object takes up</a:t>
-            </a:r>
-            <a:endParaRPr lang="en-US" sz="1300" dirty="0"/>
-          </a:p>
-          <a:p>
-            <a:pPr indent="0" marL="0">
-              <a:spcAft>
-                <a:spcPts val="500"/>
-              </a:spcAft>
-              <a:buNone/>
-            </a:pPr>
-            <a:r>
-              <a:rPr lang="en-US" sz="1300" b="1" dirty="0">
-                <a:solidFill>
-                  <a:srgbClr val="0F2A5F"/>
-                </a:solidFill>
-              </a:rPr>
-              <a:t>ratio</a:t>
-            </a:r>
-            <a:pPr indent="0" marL="0">
-              <a:spcAft>
-                <a:spcPts val="500"/>
-              </a:spcAft>
-              <a:buNone/>
-            </a:pPr>
-            <a:r>
-              <a:rPr lang="en-US" sz="1300" dirty="0">
-                <a:solidFill>
-                  <a:srgbClr val="141B26"/>
-                </a:solidFill>
-              </a:rPr>
-              <a:t>  one quantity compared with another, e.g. 6 : 1</a:t>
-            </a:r>
-            <a:endParaRPr lang="en-US" sz="1300" dirty="0"/>
-          </a:p>
-          <a:p>
-            <a:pPr indent="0" marL="0">
-              <a:spcAft>
-                <a:spcPts val="500"/>
-              </a:spcAft>
-              <a:buNone/>
-            </a:pPr>
-            <a:r>
-              <a:rPr lang="en-US" sz="1300" b="1" dirty="0">
-                <a:solidFill>
-                  <a:srgbClr val="0F2A5F"/>
-                </a:solidFill>
-              </a:rPr>
-              <a:t>diffusion</a:t>
-            </a:r>
-            <a:pPr indent="0" marL="0">
-              <a:spcAft>
-                <a:spcPts val="500"/>
-              </a:spcAft>
-              <a:buNone/>
-            </a:pPr>
-            <a:r>
-              <a:rPr lang="en-US" sz="1300" dirty="0">
-                <a:solidFill>
-                  <a:srgbClr val="141B26"/>
-                </a:solidFill>
-              </a:rPr>
-              <a:t>  the overall movement of particles from where they are more concentrated to where they are less concentrated</a:t>
-            </a:r>
-            <a:endParaRPr lang="en-US" sz="1300" dirty="0"/>
-          </a:p>
-          <a:p>
-            <a:pPr indent="0" marL="0">
-              <a:spcAft>
-                <a:spcPts val="500"/>
-              </a:spcAft>
-              <a:buNone/>
-            </a:pPr>
-            <a:r>
-              <a:rPr lang="en-US" sz="1300" b="1" dirty="0">
-                <a:solidFill>
-                  <a:srgbClr val="0F2A5F"/>
-                </a:solidFill>
-              </a:rPr>
-              <a:t>concentration gradient</a:t>
-            </a:r>
-            <a:pPr indent="0" marL="0">
-              <a:spcAft>
-                <a:spcPts val="500"/>
-              </a:spcAft>
-              <a:buNone/>
-            </a:pPr>
-            <a:r>
-              <a:rPr lang="en-US" sz="1300" dirty="0">
-                <a:solidFill>
-                  <a:srgbClr val="141B26"/>
-                </a:solidFill>
-              </a:rPr>
-              <a:t>  a difference in concentration between two places</a:t>
-            </a:r>
-            <a:endParaRPr lang="en-US" sz="1300" dirty="0"/>
-          </a:p>
-          <a:p>
-            <a:pPr indent="0" marL="0">
-              <a:spcAft>
-                <a:spcPts val="500"/>
-              </a:spcAft>
-              <a:buNone/>
-            </a:pPr>
-            <a:r>
-              <a:rPr lang="en-US" sz="1300" b="1" dirty="0">
-                <a:solidFill>
-                  <a:srgbClr val="0F2A5F"/>
-                </a:solidFill>
-              </a:rPr>
-              <a:t>osmosis</a:t>
-            </a:r>
-            <a:pPr indent="0" marL="0">
-              <a:spcAft>
-                <a:spcPts val="500"/>
-              </a:spcAft>
-              <a:buNone/>
-            </a:pPr>
-            <a:r>
-              <a:rPr lang="en-US" sz="1300" dirty="0">
-                <a:solidFill>
-                  <a:srgbClr val="141B26"/>
-                </a:solidFill>
-              </a:rPr>
-              <a:t>  the diffusion of water molecules through a partially permeable membrane</a:t>
-            </a:r>
-            <a:endParaRPr lang="en-US" sz="1300" dirty="0"/>
-          </a:p>
-          <a:p>
-            <a:pPr indent="0" marL="0">
-              <a:spcAft>
-                <a:spcPts val="500"/>
-              </a:spcAft>
-              <a:buNone/>
-            </a:pPr>
-            <a:r>
-              <a:rPr lang="en-US" sz="1300" b="1" dirty="0">
-                <a:solidFill>
-                  <a:srgbClr val="0F2A5F"/>
-                </a:solidFill>
-              </a:rPr>
-              <a:t>partially permeable membrane</a:t>
-            </a:r>
-            <a:pPr indent="0" marL="0">
-              <a:spcAft>
-                <a:spcPts val="500"/>
-              </a:spcAft>
-              <a:buNone/>
-            </a:pPr>
-            <a:r>
-              <a:rPr lang="en-US" sz="1300" dirty="0">
-                <a:solidFill>
-                  <a:srgbClr val="141B26"/>
-                </a:solidFill>
-              </a:rPr>
-              <a:t>  a membrane with tiny holes that let small molecules through but not large ones</a:t>
-            </a:r>
-            <a:endParaRPr lang="en-US" sz="1300" dirty="0"/>
-          </a:p>
-          <a:p>
-            <a:pPr indent="0" marL="0">
-              <a:spcAft>
-                <a:spcPts val="500"/>
-              </a:spcAft>
-              <a:buNone/>
-            </a:pPr>
-            <a:r>
-              <a:rPr lang="en-US" sz="1300" b="1" dirty="0">
-                <a:solidFill>
-                  <a:srgbClr val="0F2A5F"/>
-                </a:solidFill>
-              </a:rPr>
-              <a:t>cell membrane</a:t>
-            </a:r>
-            <a:pPr indent="0" marL="0">
-              <a:spcAft>
-                <a:spcPts val="500"/>
-              </a:spcAft>
-              <a:buNone/>
-            </a:pPr>
-            <a:r>
-              <a:rPr lang="en-US" sz="1300" dirty="0">
-                <a:solidFill>
-                  <a:srgbClr val="141B26"/>
-                </a:solidFill>
-              </a:rPr>
-              <a:t>  the partially permeable layer around a cell</a:t>
-            </a:r>
-            <a:endParaRPr lang="en-US" sz="1300" dirty="0"/>
-          </a:p>
-          <a:p>
-            <a:pPr indent="0" marL="0">
-              <a:spcAft>
-                <a:spcPts val="500"/>
-              </a:spcAft>
-              <a:buNone/>
-            </a:pPr>
-            <a:r>
-              <a:rPr lang="en-US" sz="1300" b="1" dirty="0">
-                <a:solidFill>
-                  <a:srgbClr val="0F2A5F"/>
-                </a:solidFill>
-              </a:rPr>
-              <a:t>unicellular</a:t>
-            </a:r>
-            <a:pPr indent="0" marL="0">
-              <a:spcAft>
-                <a:spcPts val="500"/>
-              </a:spcAft>
-              <a:buNone/>
-            </a:pPr>
-            <a:r>
-              <a:rPr lang="en-US" sz="1300" dirty="0">
-                <a:solidFill>
-                  <a:srgbClr val="141B26"/>
-                </a:solidFill>
-              </a:rPr>
-              <a:t>  made of one cell</a:t>
-            </a:r>
-            <a:endParaRPr lang="en-US" sz="1300" dirty="0"/>
-          </a:p>
-          <a:p>
-            <a:pPr indent="0" marL="0">
-              <a:spcAft>
-                <a:spcPts val="500"/>
-              </a:spcAft>
-              <a:buNone/>
-            </a:pPr>
-            <a:r>
-              <a:rPr lang="en-US" sz="1300" b="1" dirty="0">
-                <a:solidFill>
-                  <a:srgbClr val="0F2A5F"/>
-                </a:solidFill>
-              </a:rPr>
-              <a:t>villi</a:t>
-            </a:r>
-            <a:pPr indent="0" marL="0">
-              <a:spcAft>
-                <a:spcPts val="500"/>
-              </a:spcAft>
-              <a:buNone/>
-            </a:pPr>
-            <a:r>
-              <a:rPr lang="en-US" sz="1300" dirty="0">
-                <a:solidFill>
-                  <a:srgbClr val="141B26"/>
-                </a:solidFill>
-              </a:rPr>
-              <a:t>  finger-like folds that give the small intestine a large surface area</a:t>
-            </a:r>
-            <a:endParaRPr lang="en-US" sz="1300" dirty="0"/>
-          </a:p>
-          <a:p>
-            <a:pPr indent="0" marL="0">
-              <a:spcAft>
-                <a:spcPts val="500"/>
-              </a:spcAft>
-              <a:buNone/>
-            </a:pPr>
-            <a:r>
-              <a:rPr lang="en-US" sz="1300" b="1" dirty="0">
-                <a:solidFill>
-                  <a:srgbClr val="0F2A5F"/>
-                </a:solidFill>
-              </a:rPr>
-              <a:t>pandemic</a:t>
-            </a:r>
-            <a:pPr indent="0" marL="0">
-              <a:spcAft>
-                <a:spcPts val="500"/>
-              </a:spcAft>
-              <a:buNone/>
-            </a:pPr>
-            <a:r>
-              <a:rPr lang="en-US" sz="1300" dirty="0">
-                <a:solidFill>
-                  <a:srgbClr val="141B26"/>
-                </a:solidFill>
-              </a:rPr>
-              <a:t>  an outbreak of a disease across the whole world</a:t>
-            </a:r>
-            <a:endParaRPr lang="en-US" sz="1300" dirty="0"/>
+              <a:buNone/>
+            </a:pPr>
+            <a:r>
+              <a:rPr lang="en-US" sz="1400" i="1" dirty="0">
+                <a:solidFill>
+                  <a:srgbClr val="5B6574"/>
+                </a:solidFill>
+              </a:rPr>
+              <a:t>Meanings are in the key words box on your worksheet.</a:t>
+            </a:r>
+            <a:endParaRPr lang="en-US" sz="1400" dirty="0"/>
           </a:p>
         </p:txBody>
       </p:sp>
@@ -6555,7 +6454,7 @@
         <p:spPr>
           <a:xfrm>
             <a:off x="548640" y="1371600"/>
-            <a:ext cx="5394960" cy="2377440"/>
+            <a:ext cx="5394960" cy="2651760"/>
           </a:xfrm>
           <a:prstGeom prst="rect">
             <a:avLst/>
@@ -6564,23 +6463,21 @@
           <a:ln/>
         </p:spPr>
         <p:txBody>
-          <a:bodyPr wrap="square" lIns="0" tIns="0" rIns="0" bIns="0" rtlCol="0" anchor="t">
-            <a:normAutofit/>
-          </a:bodyPr>
+          <a:bodyPr wrap="square" lIns="0" tIns="0" rIns="0" bIns="0" rtlCol="0" anchor="t"/>
           <a:lstStyle/>
           <a:p>
             <a:pPr indent="0" marL="0">
               <a:buNone/>
             </a:pPr>
             <a:r>
-              <a:rPr lang="en-US" sz="2800" b="1" dirty="0">
+              <a:rPr lang="en-US" sz="2400" b="1" dirty="0">
                 <a:solidFill>
                   <a:srgbClr val="0F2A5F"/>
                 </a:solidFill>
               </a:rPr>
               <a:t>In the Second World War, one in six Allied soldiers who died in the tropics was killed by tropical sprue, a disease that flattens the lining of the small intestine. Why would a flatter lining be deadly?</a:t>
             </a:r>
-            <a:endParaRPr lang="en-US" sz="2800" dirty="0"/>
+            <a:endParaRPr lang="en-US" sz="2400" dirty="0"/>
           </a:p>
         </p:txBody>
       </p:sp>
@@ -6592,8 +6489,8 @@
         </p:nvSpPr>
         <p:spPr>
           <a:xfrm>
-            <a:off x="548640" y="3794760"/>
-            <a:ext cx="5394960" cy="2103120"/>
+            <a:off x="548640" y="4114800"/>
+            <a:ext cx="5394960" cy="1828800"/>
           </a:xfrm>
           <a:prstGeom prst="rect">
             <a:avLst/>
@@ -6602,9 +6499,7 @@
           <a:ln/>
         </p:spPr>
         <p:txBody>
-          <a:bodyPr wrap="square" lIns="0" tIns="0" rIns="0" bIns="0" rtlCol="0" anchor="t">
-            <a:normAutofit/>
-          </a:bodyPr>
+          <a:bodyPr wrap="square" lIns="0" tIns="0" rIns="0" bIns="0" rtlCol="0" anchor="t"/>
           <a:lstStyle/>
           <a:p>
             <a:pPr indent="0" marL="0">
@@ -6614,14 +6509,14 @@
               <a:buNone/>
             </a:pPr>
             <a:r>
-              <a:rPr lang="en-US" sz="1600" dirty="0">
+              <a:rPr lang="en-US" sz="2000" dirty="0">
                 <a:solidFill>
                   <a:srgbClr val="141B26"/>
                 </a:solidFill>
               </a:rPr>
               <a:t>Talk to a partner: what does the small intestine do, and how does a flat lining stop it?</a:t>
             </a:r>
-            <a:endParaRPr lang="en-US" sz="1600" dirty="0"/>
+            <a:endParaRPr lang="en-US" sz="2000" dirty="0"/>
           </a:p>
         </p:txBody>
       </p:sp>
@@ -6658,7 +6553,7 @@
         <p:spPr>
           <a:xfrm>
             <a:off x="6309360" y="5417820"/>
-            <a:ext cx="5303520" cy="502920"/>
+            <a:ext cx="5303520" cy="548640"/>
           </a:xfrm>
           <a:prstGeom prst="rect">
             <a:avLst/>
@@ -6674,7 +6569,7 @@
               <a:buNone/>
             </a:pPr>
             <a:r>
-              <a:rPr lang="en-US" sz="1100" dirty="0">
+              <a:rPr lang="en-US" sz="1300" dirty="0">
                 <a:solidFill>
                   <a:srgbClr val="141B26"/>
                 </a:solidFill>
@@ -6684,21 +6579,21 @@
             <a:pPr algn="l" indent="0" marL="0">
               <a:buNone/>
             </a:pPr>
-            <a:endParaRPr lang="en-US" sz="1100" dirty="0"/>
+            <a:endParaRPr lang="en-US" sz="1300" dirty="0"/>
           </a:p>
           <a:p>
             <a:pPr algn="l" indent="0" marL="0">
               <a:buNone/>
             </a:pPr>
             <a:r>
-              <a:rPr lang="en-US" sz="800" dirty="0">
+              <a:rPr lang="en-US" sz="900" dirty="0">
                 <a:solidFill>
                   <a:srgbClr val="5B6574"/>
                 </a:solidFill>
               </a:rPr>
               <a:t>Image: euthman, CC BY 2.0, via Wikimedia Commons</a:t>
             </a:r>
-            <a:endParaRPr lang="en-US" sz="1100" dirty="0"/>
+            <a:endParaRPr lang="en-US" sz="1300" dirty="0"/>
           </a:p>
         </p:txBody>
       </p:sp>
@@ -6898,14 +6793,14 @@
               <a:buNone/>
             </a:pPr>
             <a:r>
-              <a:rPr lang="en-US" sz="1600" dirty="0">
+              <a:rPr lang="en-US" sz="1800" dirty="0">
                 <a:solidFill>
                   <a:srgbClr val="141B26"/>
                 </a:solidFill>
               </a:rPr>
               <a:t>Surface area / volume gives the SA:V ratio. Compare the three cubes.</a:t>
             </a:r>
-            <a:endParaRPr lang="en-US" sz="1600" dirty="0"/>
+            <a:endParaRPr lang="en-US" sz="1800" dirty="0"/>
           </a:p>
         </p:txBody>
       </p:sp>
@@ -6976,16 +6871,14 @@
           <a:ln/>
         </p:spPr>
         <p:txBody>
-          <a:bodyPr wrap="square" lIns="0" tIns="0" rIns="0" bIns="0" rtlCol="0" anchor="ctr">
-            <a:normAutofit/>
-          </a:bodyPr>
+          <a:bodyPr wrap="square" lIns="0" tIns="0" rIns="0" bIns="0" rtlCol="0" anchor="ctr"/>
           <a:lstStyle/>
           <a:p>
             <a:pPr indent="0" marL="0">
               <a:buNone/>
             </a:pPr>
             <a:r>
-              <a:rPr lang="en-US" sz="1400" b="1" dirty="0">
+              <a:rPr lang="en-US" sz="1700" b="1" dirty="0">
                 <a:solidFill>
                   <a:srgbClr val="7B3A8E"/>
                 </a:solidFill>
@@ -6996,14 +6889,14 @@
               <a:buNone/>
             </a:pPr>
             <a:r>
-              <a:rPr lang="en-US" sz="1400" dirty="0">
+              <a:rPr lang="en-US" sz="1700" dirty="0">
                 <a:solidFill>
                   <a:srgbClr val="141B26"/>
                 </a:solidFill>
               </a:rPr>
               <a:t>As an object gets bigger, its surface area : volume ratio gets smaller.</a:t>
             </a:r>
-            <a:endParaRPr lang="en-US" sz="1400" dirty="0"/>
+            <a:endParaRPr lang="en-US" sz="1700" dirty="0"/>
           </a:p>
         </p:txBody>
       </p:sp>
@@ -7186,8 +7079,8 @@
         </p:nvSpPr>
         <p:spPr>
           <a:xfrm>
-            <a:off x="548640" y="6053328"/>
-            <a:ext cx="9601200" cy="292608"/>
+            <a:off x="548640" y="6035040"/>
+            <a:ext cx="9601200" cy="310896"/>
           </a:xfrm>
           <a:prstGeom prst="rect">
             <a:avLst/>
@@ -7203,7 +7096,7 @@
               <a:buNone/>
             </a:pPr>
             <a:r>
-              <a:rPr lang="en-US" sz="1200" b="1" dirty="0">
+              <a:rPr lang="en-US" sz="1400" b="1" dirty="0">
                 <a:solidFill>
                   <a:srgbClr val="7B3A8E"/>
                 </a:solidFill>
@@ -7214,14 +7107,14 @@
               <a:buNone/>
             </a:pPr>
             <a:r>
-              <a:rPr lang="en-US" sz="1200" dirty="0">
+              <a:rPr lang="en-US" sz="1400" dirty="0">
                 <a:solidFill>
                   <a:srgbClr val="7B3A8E"/>
                 </a:solidFill>
               </a:rPr>
               <a:t>unicellular   ·   villi   ·   surface area</a:t>
             </a:r>
-            <a:endParaRPr lang="en-US" sz="1200" dirty="0"/>
+            <a:endParaRPr lang="en-US" sz="1400" dirty="0"/>
           </a:p>
         </p:txBody>
       </p:sp>
@@ -7243,81 +7136,79 @@
           <a:ln/>
         </p:spPr>
         <p:txBody>
-          <a:bodyPr wrap="square" lIns="0" tIns="0" rIns="0" bIns="0" rtlCol="0" anchor="t">
-            <a:normAutofit/>
-          </a:bodyPr>
-          <a:lstStyle/>
-          <a:p>
-            <a:pPr marL="228600" indent="-228600">
+          <a:bodyPr wrap="square" lIns="0" tIns="0" rIns="0" bIns="0" rtlCol="0" anchor="t"/>
+          <a:lstStyle/>
+          <a:p>
+            <a:pPr marL="304800" indent="-304800">
               <a:spcAft>
-                <a:spcPts val="600"/>
+                <a:spcPts val="800"/>
               </a:spcAft>
               <a:buSzPct val="100000"/>
               <a:buChar char="•"/>
             </a:pPr>
             <a:r>
-              <a:rPr lang="en-US" sz="1700" dirty="0">
+              <a:rPr lang="en-US" sz="1900" dirty="0">
                 <a:solidFill>
                   <a:srgbClr val="141B26"/>
                 </a:solidFill>
               </a:rPr>
               <a:t>A unicellular organism has enough surface for diffusion to supply its whole volume.</a:t>
             </a:r>
-            <a:endParaRPr lang="en-US" sz="1700" dirty="0"/>
-          </a:p>
-          <a:p>
-            <a:pPr marL="228600" indent="-228600">
+            <a:endParaRPr lang="en-US" sz="1900" dirty="0"/>
+          </a:p>
+          <a:p>
+            <a:pPr marL="304800" indent="-304800">
               <a:spcAft>
-                <a:spcPts val="600"/>
+                <a:spcPts val="800"/>
               </a:spcAft>
               <a:buSzPct val="100000"/>
               <a:buChar char="•"/>
             </a:pPr>
             <a:r>
-              <a:rPr lang="en-US" sz="1700" dirty="0">
+              <a:rPr lang="en-US" sz="1900" dirty="0">
                 <a:solidFill>
                   <a:srgbClr val="141B26"/>
                 </a:solidFill>
               </a:rPr>
               <a:t>Large organisms have too little outside surface, so they have organs with large surface areas (villi, lungs, leaves) and transport systems.</a:t>
             </a:r>
-            <a:endParaRPr lang="en-US" sz="1700" dirty="0"/>
-          </a:p>
-          <a:p>
-            <a:pPr marL="228600" indent="-228600">
+            <a:endParaRPr lang="en-US" sz="1900" dirty="0"/>
+          </a:p>
+          <a:p>
+            <a:pPr marL="304800" indent="-304800">
               <a:spcAft>
-                <a:spcPts val="600"/>
+                <a:spcPts val="800"/>
               </a:spcAft>
               <a:buSzPct val="100000"/>
               <a:buChar char="•"/>
             </a:pPr>
             <a:r>
-              <a:rPr lang="en-US" sz="1700" dirty="0">
+              <a:rPr lang="en-US" sz="1900" dirty="0">
                 <a:solidFill>
                   <a:srgbClr val="141B26"/>
                 </a:solidFill>
               </a:rPr>
               <a:t>Small animals have a larger SA:V ratio, so they lose energy (cool down) faster and must eat more for their size.</a:t>
             </a:r>
-            <a:endParaRPr lang="en-US" sz="1700" dirty="0"/>
-          </a:p>
-          <a:p>
-            <a:pPr marL="228600" indent="-228600">
+            <a:endParaRPr lang="en-US" sz="1900" dirty="0"/>
+          </a:p>
+          <a:p>
+            <a:pPr marL="304800" indent="-304800">
               <a:spcAft>
-                <a:spcPts val="600"/>
+                <a:spcPts val="800"/>
               </a:spcAft>
               <a:buSzPct val="100000"/>
               <a:buChar char="•"/>
             </a:pPr>
             <a:r>
-              <a:rPr lang="en-US" sz="1700" dirty="0">
+              <a:rPr lang="en-US" sz="1900" dirty="0">
                 <a:solidFill>
                   <a:srgbClr val="141B26"/>
                 </a:solidFill>
               </a:rPr>
               <a:t>A silky anteater (under 400 g) eats up to 5000 ants a day; a giant anteater (40 kg) eats 30 000.</a:t>
             </a:r>
-            <a:endParaRPr lang="en-US" sz="1700" dirty="0"/>
+            <a:endParaRPr lang="en-US" sz="1900" dirty="0"/>
           </a:p>
         </p:txBody>
       </p:sp>
@@ -7354,7 +7245,7 @@
         <p:spPr>
           <a:xfrm>
             <a:off x="6583680" y="4983480"/>
-            <a:ext cx="5029200" cy="502920"/>
+            <a:ext cx="5029200" cy="548640"/>
           </a:xfrm>
           <a:prstGeom prst="rect">
             <a:avLst/>
@@ -7370,7 +7261,7 @@
               <a:buNone/>
             </a:pPr>
             <a:r>
-              <a:rPr lang="en-US" sz="1100" dirty="0">
+              <a:rPr lang="en-US" sz="1300" dirty="0">
                 <a:solidFill>
                   <a:srgbClr val="141B26"/>
                 </a:solidFill>
@@ -7380,21 +7271,21 @@
             <a:pPr algn="l" indent="0" marL="0">
               <a:buNone/>
             </a:pPr>
-            <a:endParaRPr lang="en-US" sz="1100" dirty="0"/>
+            <a:endParaRPr lang="en-US" sz="1300" dirty="0"/>
           </a:p>
           <a:p>
             <a:pPr algn="l" indent="0" marL="0">
               <a:buNone/>
             </a:pPr>
             <a:r>
-              <a:rPr lang="en-US" sz="800" dirty="0">
+              <a:rPr lang="en-US" sz="900" dirty="0">
                 <a:solidFill>
                   <a:srgbClr val="5B6574"/>
                 </a:solidFill>
               </a:rPr>
               <a:t>Image: D-Stanley, CC BY 2.0, via Wikimedia Commons</a:t>
             </a:r>
-            <a:endParaRPr lang="en-US" sz="1100" dirty="0"/>
+            <a:endParaRPr lang="en-US" sz="1300" dirty="0"/>
           </a:p>
         </p:txBody>
       </p:sp>
@@ -7441,16 +7332,14 @@
           <a:ln/>
         </p:spPr>
         <p:txBody>
-          <a:bodyPr wrap="square" lIns="0" tIns="0" rIns="0" bIns="0" rtlCol="0" anchor="ctr">
-            <a:normAutofit/>
-          </a:bodyPr>
+          <a:bodyPr wrap="square" lIns="0" tIns="0" rIns="0" bIns="0" rtlCol="0" anchor="ctr"/>
           <a:lstStyle/>
           <a:p>
             <a:pPr indent="0" marL="0">
               <a:buNone/>
             </a:pPr>
             <a:r>
-              <a:rPr lang="en-US" sz="1400" b="1" dirty="0">
+              <a:rPr lang="en-US" sz="1700" b="1" dirty="0">
                 <a:solidFill>
                   <a:srgbClr val="7B3A8E"/>
                 </a:solidFill>
@@ -7461,14 +7350,14 @@
               <a:buNone/>
             </a:pPr>
             <a:r>
-              <a:rPr lang="en-US" sz="1400" dirty="0">
+              <a:rPr lang="en-US" sz="1700" dirty="0">
                 <a:solidFill>
                   <a:srgbClr val="141B26"/>
                 </a:solidFill>
               </a:rPr>
               <a:t>Large surface area : volume ratio = fast exchange with the surroundings.</a:t>
             </a:r>
-            <a:endParaRPr lang="en-US" sz="1400" dirty="0"/>
+            <a:endParaRPr lang="en-US" sz="1700" dirty="0"/>
           </a:p>
         </p:txBody>
       </p:sp>
@@ -7668,14 +7557,14 @@
               <a:buNone/>
             </a:pPr>
             <a:r>
-              <a:rPr lang="en-US" sz="1600" dirty="0">
+              <a:rPr lang="en-US" sz="1500" dirty="0">
                 <a:solidFill>
                   <a:srgbClr val="141B26"/>
                 </a:solidFill>
               </a:rPr>
               <a:t>All particles move randomly. Where there is a concentration gradient, more particles move from the higher concentration to the lower than the other way.</a:t>
             </a:r>
-            <a:endParaRPr lang="en-US" sz="1600" dirty="0"/>
+            <a:endParaRPr lang="en-US" sz="1500" dirty="0"/>
           </a:p>
         </p:txBody>
       </p:sp>
@@ -7746,16 +7635,14 @@
           <a:ln/>
         </p:spPr>
         <p:txBody>
-          <a:bodyPr wrap="square" lIns="0" tIns="0" rIns="0" bIns="0" rtlCol="0" anchor="ctr">
-            <a:normAutofit/>
-          </a:bodyPr>
+          <a:bodyPr wrap="square" lIns="0" tIns="0" rIns="0" bIns="0" rtlCol="0" anchor="ctr"/>
           <a:lstStyle/>
           <a:p>
             <a:pPr indent="0" marL="0">
               <a:buNone/>
             </a:pPr>
             <a:r>
-              <a:rPr lang="en-US" sz="1400" b="1" dirty="0">
+              <a:rPr lang="en-US" sz="1700" b="1" dirty="0">
                 <a:solidFill>
                   <a:srgbClr val="7B3A8E"/>
                 </a:solidFill>
@@ -7766,14 +7653,14 @@
               <a:buNone/>
             </a:pPr>
             <a:r>
-              <a:rPr lang="en-US" sz="1400" dirty="0">
+              <a:rPr lang="en-US" sz="1700" dirty="0">
                 <a:solidFill>
                   <a:srgbClr val="141B26"/>
                 </a:solidFill>
               </a:rPr>
               <a:t>Diffusion is faster when it is warmer and when the concentration difference is bigger.</a:t>
             </a:r>
-            <a:endParaRPr lang="en-US" sz="1400" dirty="0"/>
+            <a:endParaRPr lang="en-US" sz="1700" dirty="0"/>
           </a:p>
         </p:txBody>
       </p:sp>
@@ -7973,14 +7860,14 @@
               <a:buNone/>
             </a:pPr>
             <a:r>
-              <a:rPr lang="en-US" sz="1600" dirty="0">
+              <a:rPr lang="en-US" sz="1500" dirty="0">
                 <a:solidFill>
                   <a:srgbClr val="141B26"/>
                 </a:solidFill>
               </a:rPr>
               <a:t>Some membranes have tiny holes that let small molecules (water) through but not large ones (sugar). They are partially permeable.</a:t>
             </a:r>
-            <a:endParaRPr lang="en-US" sz="1600" dirty="0"/>
+            <a:endParaRPr lang="en-US" sz="1500" dirty="0"/>
           </a:p>
         </p:txBody>
       </p:sp>
@@ -8051,16 +7938,14 @@
           <a:ln/>
         </p:spPr>
         <p:txBody>
-          <a:bodyPr wrap="square" lIns="0" tIns="0" rIns="0" bIns="0" rtlCol="0" anchor="ctr">
-            <a:normAutofit/>
-          </a:bodyPr>
+          <a:bodyPr wrap="square" lIns="0" tIns="0" rIns="0" bIns="0" rtlCol="0" anchor="ctr"/>
           <a:lstStyle/>
           <a:p>
             <a:pPr indent="0" marL="0">
               <a:buNone/>
             </a:pPr>
             <a:r>
-              <a:rPr lang="en-US" sz="1400" b="1" dirty="0">
+              <a:rPr lang="en-US" sz="1700" b="1" dirty="0">
                 <a:solidFill>
                   <a:srgbClr val="7B3A8E"/>
                 </a:solidFill>
@@ -8071,14 +7956,14 @@
               <a:buNone/>
             </a:pPr>
             <a:r>
-              <a:rPr lang="en-US" sz="1400" dirty="0">
+              <a:rPr lang="en-US" sz="1700" dirty="0">
                 <a:solidFill>
                   <a:srgbClr val="141B26"/>
                 </a:solidFill>
               </a:rPr>
               <a:t>Osmosis is the diffusion of water molecules through a partially permeable membrane, from where there are more water molecules to where there are fewer.</a:t>
             </a:r>
-            <a:endParaRPr lang="en-US" sz="1400" dirty="0"/>
+            <a:endParaRPr lang="en-US" sz="1700" dirty="0"/>
           </a:p>
         </p:txBody>
       </p:sp>
@@ -8179,14 +8064,14 @@
               <a:buNone/>
             </a:pPr>
             <a:r>
-              <a:rPr lang="en-US" sz="3000" b="1" dirty="0">
+              <a:rPr lang="en-US" sz="3400" b="1" dirty="0">
                 <a:solidFill>
                   <a:srgbClr val="3A2E00"/>
                 </a:solidFill>
               </a:rPr>
               <a:t>Safety: potato strips</a:t>
             </a:r>
-            <a:endParaRPr lang="en-US" sz="3000" dirty="0"/>
+            <a:endParaRPr lang="en-US" sz="3400" dirty="0"/>
           </a:p>
         </p:txBody>
       </p:sp>
@@ -8274,58 +8159,58 @@
           <a:bodyPr wrap="square" lIns="0" tIns="0" rIns="0" bIns="0" rtlCol="0" anchor="t"/>
           <a:lstStyle/>
           <a:p>
-            <a:pPr marL="228600" indent="-228600">
+            <a:pPr marL="304800" indent="-304800">
               <a:spcAft>
-                <a:spcPts val="600"/>
+                <a:spcPts val="800"/>
               </a:spcAft>
               <a:buSzPct val="100000"/>
               <a:buChar char="•"/>
             </a:pPr>
             <a:r>
-              <a:rPr lang="en-US" sz="2000" dirty="0">
+              <a:rPr lang="en-US" sz="2600" dirty="0">
                 <a:solidFill>
                   <a:srgbClr val="3A2E00"/>
                 </a:solidFill>
               </a:rPr>
               <a:t>Cut potato with a cork borer or knife on a board, cutting away from your fingers, or use the strips your teacher has prepared.</a:t>
             </a:r>
-            <a:endParaRPr lang="en-US" sz="2000" dirty="0"/>
-          </a:p>
-          <a:p>
-            <a:pPr marL="228600" indent="-228600">
+            <a:endParaRPr lang="en-US" sz="2600" dirty="0"/>
+          </a:p>
+          <a:p>
+            <a:pPr marL="304800" indent="-304800">
               <a:spcAft>
-                <a:spcPts val="600"/>
+                <a:spcPts val="800"/>
               </a:spcAft>
               <a:buSzPct val="100000"/>
               <a:buChar char="•"/>
             </a:pPr>
             <a:r>
-              <a:rPr lang="en-US" sz="2000" dirty="0">
+              <a:rPr lang="en-US" sz="2600" dirty="0">
                 <a:solidFill>
                   <a:srgbClr val="3A2E00"/>
                 </a:solidFill>
               </a:rPr>
               <a:t>Salt solution is harmless to touch but slippery on the floor. Wipe up spills at once.</a:t>
             </a:r>
-            <a:endParaRPr lang="en-US" sz="2000" dirty="0"/>
-          </a:p>
-          <a:p>
-            <a:pPr marL="228600" indent="-228600">
+            <a:endParaRPr lang="en-US" sz="2600" dirty="0"/>
+          </a:p>
+          <a:p>
+            <a:pPr marL="304800" indent="-304800">
               <a:spcAft>
-                <a:spcPts val="600"/>
+                <a:spcPts val="800"/>
               </a:spcAft>
               <a:buSzPct val="100000"/>
               <a:buChar char="•"/>
             </a:pPr>
             <a:r>
-              <a:rPr lang="en-US" sz="2000" dirty="0">
+              <a:rPr lang="en-US" sz="2600" dirty="0">
                 <a:solidFill>
                   <a:srgbClr val="3A2E00"/>
                 </a:solidFill>
               </a:rPr>
               <a:t>Do not eat the potato. Wash your hands at the end.</a:t>
             </a:r>
-            <a:endParaRPr lang="en-US" sz="2000" dirty="0"/>
+            <a:endParaRPr lang="en-US" sz="2600" dirty="0"/>
           </a:p>
         </p:txBody>
       </p:sp>
